--- a/docs/Airflow_Vascular_Intro.pptx
+++ b/docs/Airflow_Vascular_Intro.pptx
@@ -15,6 +15,7 @@
     <p:sldId id="263" r:id="rId14"/>
     <p:sldId id="264" r:id="rId15"/>
     <p:sldId id="265" r:id="rId16"/>
+    <p:sldId id="266" r:id="rId17"/>
   </p:sldIdLst>
   <p:sldSz cx="9144000" cy="6858000" type="screen4x3"/>
   <p:notesSz cx="6858000" cy="9144000"/>
@@ -3588,7 +3589,7 @@
               </a:defRPr>
             </a:pPr>
             <a:r>
-              <a:t>CLOSE</a:t>
+              <a:t>ROADMAP</a:t>
             </a:r>
           </a:p>
         </p:txBody>
@@ -3623,7 +3624,7 @@
               </a:defRPr>
             </a:pPr>
             <a:r>
-              <a:t>Summary</a:t>
+              <a:t>Future development (TBC)</a:t>
             </a:r>
           </a:p>
         </p:txBody>
@@ -3659,6 +3660,565 @@
             </a:pPr>
             <a:r>
               <a:t>09</a:t>
+            </a:r>
+          </a:p>
+        </p:txBody>
+      </p:sp>
+      <p:sp>
+        <p:nvSpPr>
+          <p:cNvPr id="6" name="Rounded Rectangle 5"/>
+          <p:cNvSpPr/>
+          <p:nvPr/>
+        </p:nvSpPr>
+        <p:spPr>
+          <a:xfrm>
+            <a:off x="640080" y="1325880"/>
+            <a:ext cx="2377440" cy="1325880"/>
+          </a:xfrm>
+          <a:prstGeom prst="roundRect">
+            <a:avLst/>
+          </a:prstGeom>
+          <a:solidFill>
+            <a:srgbClr val="295683"/>
+          </a:solidFill>
+          <a:ln w="12700">
+            <a:solidFill>
+              <a:srgbClr val="5D7B9D"/>
+            </a:solidFill>
+          </a:ln>
+        </p:spPr>
+        <p:style>
+          <a:lnRef idx="1">
+            <a:schemeClr val="accent1"/>
+          </a:lnRef>
+          <a:fillRef idx="3">
+            <a:schemeClr val="accent1"/>
+          </a:fillRef>
+          <a:effectRef idx="2">
+            <a:schemeClr val="accent1"/>
+          </a:effectRef>
+          <a:fontRef idx="minor">
+            <a:schemeClr val="lt1"/>
+          </a:fontRef>
+        </p:style>
+        <p:txBody>
+          <a:bodyPr rtlCol="0" anchor="t" wrap="square"/>
+          <a:lstStyle/>
+          <a:p>
+            <a:pPr algn="l">
+              <a:spcAft>
+                <a:spcPts val="800"/>
+              </a:spcAft>
+              <a:defRPr sz="1300" b="1">
+                <a:solidFill>
+                  <a:srgbClr val="FFFFFF"/>
+                </a:solidFill>
+              </a:defRPr>
+            </a:pPr>
+            <a:r>
+              <a:t>Prometheus</a:t>
+            </a:r>
+          </a:p>
+          <a:p>
+            <a:pPr algn="l">
+              <a:defRPr sz="1100">
+                <a:solidFill>
+                  <a:srgbClr val="D8E6F2"/>
+                </a:solidFill>
+              </a:defRPr>
+            </a:pPr>
+            <a:r>
+              <a:t>Metrics</a:t>
+            </a:r>
+          </a:p>
+          <a:p>
+            <a:pPr algn="l">
+              <a:defRPr sz="1100">
+                <a:solidFill>
+                  <a:srgbClr val="D8E6F2"/>
+                </a:solidFill>
+              </a:defRPr>
+            </a:pPr>
+            <a:r>
+              <a:t>Port 9090</a:t>
+            </a:r>
+          </a:p>
+          <a:p>
+            <a:pPr algn="l">
+              <a:defRPr sz="1100">
+                <a:solidFill>
+                  <a:srgbClr val="D8E6F2"/>
+                </a:solidFill>
+              </a:defRPr>
+            </a:pPr>
+            <a:r>
+              <a:t>Time-series storage</a:t>
+            </a:r>
+          </a:p>
+        </p:txBody>
+      </p:sp>
+      <p:sp>
+        <p:nvSpPr>
+          <p:cNvPr id="7" name="Rounded Rectangle 6"/>
+          <p:cNvSpPr/>
+          <p:nvPr/>
+        </p:nvSpPr>
+        <p:spPr>
+          <a:xfrm>
+            <a:off x="3383280" y="1325880"/>
+            <a:ext cx="2377440" cy="1325880"/>
+          </a:xfrm>
+          <a:prstGeom prst="roundRect">
+            <a:avLst/>
+          </a:prstGeom>
+          <a:solidFill>
+            <a:srgbClr val="22476B"/>
+          </a:solidFill>
+          <a:ln w="12700">
+            <a:solidFill>
+              <a:srgbClr val="5D7B9D"/>
+            </a:solidFill>
+          </a:ln>
+        </p:spPr>
+        <p:style>
+          <a:lnRef idx="1">
+            <a:schemeClr val="accent1"/>
+          </a:lnRef>
+          <a:fillRef idx="3">
+            <a:schemeClr val="accent1"/>
+          </a:fillRef>
+          <a:effectRef idx="2">
+            <a:schemeClr val="accent1"/>
+          </a:effectRef>
+          <a:fontRef idx="minor">
+            <a:schemeClr val="lt1"/>
+          </a:fontRef>
+        </p:style>
+        <p:txBody>
+          <a:bodyPr rtlCol="0" anchor="t" wrap="square"/>
+          <a:lstStyle/>
+          <a:p>
+            <a:pPr algn="l">
+              <a:spcAft>
+                <a:spcPts val="800"/>
+              </a:spcAft>
+              <a:defRPr sz="1300" b="1">
+                <a:solidFill>
+                  <a:srgbClr val="FFFFFF"/>
+                </a:solidFill>
+              </a:defRPr>
+            </a:pPr>
+            <a:r>
+              <a:t>Loki</a:t>
+            </a:r>
+          </a:p>
+          <a:p>
+            <a:pPr algn="l">
+              <a:defRPr sz="1100">
+                <a:solidFill>
+                  <a:srgbClr val="D8E6F2"/>
+                </a:solidFill>
+              </a:defRPr>
+            </a:pPr>
+            <a:r>
+              <a:t>Logs</a:t>
+            </a:r>
+          </a:p>
+          <a:p>
+            <a:pPr algn="l">
+              <a:defRPr sz="1100">
+                <a:solidFill>
+                  <a:srgbClr val="D8E6F2"/>
+                </a:solidFill>
+              </a:defRPr>
+            </a:pPr>
+            <a:r>
+              <a:t>Port 3100</a:t>
+            </a:r>
+          </a:p>
+          <a:p>
+            <a:pPr algn="l">
+              <a:defRPr sz="1100">
+                <a:solidFill>
+                  <a:srgbClr val="D8E6F2"/>
+                </a:solidFill>
+              </a:defRPr>
+            </a:pPr>
+            <a:r>
+              <a:t>Query by stream</a:t>
+            </a:r>
+          </a:p>
+        </p:txBody>
+      </p:sp>
+      <p:sp>
+        <p:nvSpPr>
+          <p:cNvPr id="8" name="Rounded Rectangle 7"/>
+          <p:cNvSpPr/>
+          <p:nvPr/>
+        </p:nvSpPr>
+        <p:spPr>
+          <a:xfrm>
+            <a:off x="6126480" y="1325880"/>
+            <a:ext cx="2377440" cy="1325880"/>
+          </a:xfrm>
+          <a:prstGeom prst="roundRect">
+            <a:avLst/>
+          </a:prstGeom>
+          <a:solidFill>
+            <a:srgbClr val="295683"/>
+          </a:solidFill>
+          <a:ln w="12700">
+            <a:solidFill>
+              <a:srgbClr val="5D7B9D"/>
+            </a:solidFill>
+          </a:ln>
+        </p:spPr>
+        <p:style>
+          <a:lnRef idx="1">
+            <a:schemeClr val="accent1"/>
+          </a:lnRef>
+          <a:fillRef idx="3">
+            <a:schemeClr val="accent1"/>
+          </a:fillRef>
+          <a:effectRef idx="2">
+            <a:schemeClr val="accent1"/>
+          </a:effectRef>
+          <a:fontRef idx="minor">
+            <a:schemeClr val="lt1"/>
+          </a:fontRef>
+        </p:style>
+        <p:txBody>
+          <a:bodyPr rtlCol="0" anchor="t" wrap="square"/>
+          <a:lstStyle/>
+          <a:p>
+            <a:pPr algn="l">
+              <a:spcAft>
+                <a:spcPts val="800"/>
+              </a:spcAft>
+              <a:defRPr sz="1300" b="1">
+                <a:solidFill>
+                  <a:srgbClr val="FFFFFF"/>
+                </a:solidFill>
+              </a:defRPr>
+            </a:pPr>
+            <a:r>
+              <a:t>Grafana</a:t>
+            </a:r>
+          </a:p>
+          <a:p>
+            <a:pPr algn="l">
+              <a:defRPr sz="1100">
+                <a:solidFill>
+                  <a:srgbClr val="D8E6F2"/>
+                </a:solidFill>
+              </a:defRPr>
+            </a:pPr>
+            <a:r>
+              <a:t>Dashboards</a:t>
+            </a:r>
+          </a:p>
+          <a:p>
+            <a:pPr algn="l">
+              <a:defRPr sz="1100">
+                <a:solidFill>
+                  <a:srgbClr val="D8E6F2"/>
+                </a:solidFill>
+              </a:defRPr>
+            </a:pPr>
+            <a:r>
+              <a:t>Port 3000</a:t>
+            </a:r>
+          </a:p>
+          <a:p>
+            <a:pPr algn="l">
+              <a:defRPr sz="1100">
+                <a:solidFill>
+                  <a:srgbClr val="D8E6F2"/>
+                </a:solidFill>
+              </a:defRPr>
+            </a:pPr>
+            <a:r>
+              <a:t>Single UI</a:t>
+            </a:r>
+          </a:p>
+        </p:txBody>
+      </p:sp>
+      <p:sp>
+        <p:nvSpPr>
+          <p:cNvPr id="9" name="Rounded Rectangle 8"/>
+          <p:cNvSpPr/>
+          <p:nvPr/>
+        </p:nvSpPr>
+        <p:spPr>
+          <a:xfrm>
+            <a:off x="1371600" y="3154680"/>
+            <a:ext cx="6400800" cy="914400"/>
+          </a:xfrm>
+          <a:prstGeom prst="roundRect">
+            <a:avLst/>
+          </a:prstGeom>
+          <a:solidFill>
+            <a:srgbClr val="22476B"/>
+          </a:solidFill>
+          <a:ln w="12700">
+            <a:solidFill>
+              <a:srgbClr val="5D7B9D"/>
+            </a:solidFill>
+          </a:ln>
+        </p:spPr>
+        <p:style>
+          <a:lnRef idx="1">
+            <a:schemeClr val="accent1"/>
+          </a:lnRef>
+          <a:fillRef idx="3">
+            <a:schemeClr val="accent1"/>
+          </a:fillRef>
+          <a:effectRef idx="2">
+            <a:schemeClr val="accent1"/>
+          </a:effectRef>
+          <a:fontRef idx="minor">
+            <a:schemeClr val="lt1"/>
+          </a:fontRef>
+        </p:style>
+        <p:txBody>
+          <a:bodyPr rtlCol="0" anchor="t" wrap="square"/>
+          <a:lstStyle/>
+          <a:p>
+            <a:pPr algn="l">
+              <a:spcAft>
+                <a:spcPts val="800"/>
+              </a:spcAft>
+              <a:defRPr sz="1300" b="1">
+                <a:solidFill>
+                  <a:srgbClr val="FFFFFF"/>
+                </a:solidFill>
+              </a:defRPr>
+            </a:pPr>
+            <a:r>
+              <a:t>Planned relationship</a:t>
+            </a:r>
+          </a:p>
+          <a:p>
+            <a:pPr algn="l">
+              <a:defRPr sz="1100">
+                <a:solidFill>
+                  <a:srgbClr val="D8E6F2"/>
+                </a:solidFill>
+              </a:defRPr>
+            </a:pPr>
+            <a:r>
+              <a:t>Prometheus -&gt; Grafana  |  Loki -&gt; Grafana</a:t>
+            </a:r>
+          </a:p>
+        </p:txBody>
+      </p:sp>
+      <p:sp>
+        <p:nvSpPr>
+          <p:cNvPr id="10" name="TextBox 9"/>
+          <p:cNvSpPr txBox="1"/>
+          <p:nvPr/>
+        </p:nvSpPr>
+        <p:spPr>
+          <a:xfrm>
+            <a:off x="502920" y="6400800"/>
+            <a:ext cx="7772400" cy="182880"/>
+          </a:xfrm>
+          <a:prstGeom prst="rect">
+            <a:avLst/>
+          </a:prstGeom>
+          <a:noFill/>
+        </p:spPr>
+        <p:txBody>
+          <a:bodyPr wrap="none">
+            <a:spAutoFit/>
+          </a:bodyPr>
+          <a:lstStyle/>
+          <a:p>
+            <a:pPr>
+              <a:defRPr sz="900">
+                <a:solidFill>
+                  <a:srgbClr val="B3C3D6"/>
+                </a:solidFill>
+              </a:defRPr>
+            </a:pPr>
+            <a:r>
+              <a:t>AirFlows and Vascular overview</a:t>
+            </a:r>
+          </a:p>
+        </p:txBody>
+      </p:sp>
+    </p:spTree>
+  </p:cSld>
+  <p:clrMapOvr>
+    <a:masterClrMapping/>
+  </p:clrMapOvr>
+</p:sld>
+</file>
+
+<file path=ppt/slides/slide11.xml><?xml version="1.0" encoding="utf-8"?>
+<p:sld xmlns:a="http://schemas.openxmlformats.org/drawingml/2006/main" xmlns:p="http://schemas.openxmlformats.org/presentationml/2006/main" xmlns:r="http://schemas.openxmlformats.org/officeDocument/2006/relationships">
+  <p:cSld>
+    <p:bg>
+      <p:bgPr>
+        <a:solidFill>
+          <a:srgbClr val="14253D"/>
+        </a:solidFill>
+        <a:effectLst/>
+      </p:bgPr>
+    </p:bg>
+    <p:spTree>
+      <p:nvGrpSpPr>
+        <p:cNvPr id="1" name=""/>
+        <p:cNvGrpSpPr/>
+        <p:nvPr/>
+      </p:nvGrpSpPr>
+      <p:grpSpPr/>
+      <p:sp>
+        <p:nvSpPr>
+          <p:cNvPr id="2" name="Rectangle 1"/>
+          <p:cNvSpPr/>
+          <p:nvPr/>
+        </p:nvSpPr>
+        <p:spPr>
+          <a:xfrm>
+            <a:off x="0" y="0"/>
+            <a:ext cx="9144000" cy="868680"/>
+          </a:xfrm>
+          <a:prstGeom prst="rect">
+            <a:avLst/>
+          </a:prstGeom>
+          <a:solidFill>
+            <a:srgbClr val="1F3B5B"/>
+          </a:solidFill>
+          <a:ln>
+            <a:solidFill>
+              <a:srgbClr val="1F3B5B"/>
+            </a:solidFill>
+          </a:ln>
+        </p:spPr>
+        <p:style>
+          <a:lnRef idx="1">
+            <a:schemeClr val="accent1"/>
+          </a:lnRef>
+          <a:fillRef idx="3">
+            <a:schemeClr val="accent1"/>
+          </a:fillRef>
+          <a:effectRef idx="2">
+            <a:schemeClr val="accent1"/>
+          </a:effectRef>
+          <a:fontRef idx="minor">
+            <a:schemeClr val="lt1"/>
+          </a:fontRef>
+        </p:style>
+        <p:txBody>
+          <a:bodyPr rtlCol="0" anchor="ctr"/>
+          <a:lstStyle/>
+          <a:p>
+            <a:pPr algn="ctr"/>
+          </a:p>
+        </p:txBody>
+      </p:sp>
+      <p:sp>
+        <p:nvSpPr>
+          <p:cNvPr id="3" name="TextBox 2"/>
+          <p:cNvSpPr txBox="1"/>
+          <p:nvPr/>
+        </p:nvSpPr>
+        <p:spPr>
+          <a:xfrm>
+            <a:off x="502920" y="164592"/>
+            <a:ext cx="1828800" cy="182880"/>
+          </a:xfrm>
+          <a:prstGeom prst="rect">
+            <a:avLst/>
+          </a:prstGeom>
+          <a:noFill/>
+        </p:spPr>
+        <p:txBody>
+          <a:bodyPr wrap="none">
+            <a:spAutoFit/>
+          </a:bodyPr>
+          <a:lstStyle/>
+          <a:p>
+            <a:pPr>
+              <a:defRPr sz="900" b="1">
+                <a:solidFill>
+                  <a:srgbClr val="4DB6E5"/>
+                </a:solidFill>
+              </a:defRPr>
+            </a:pPr>
+            <a:r>
+              <a:t>CLOSE</a:t>
+            </a:r>
+          </a:p>
+        </p:txBody>
+      </p:sp>
+      <p:sp>
+        <p:nvSpPr>
+          <p:cNvPr id="4" name="TextBox 3"/>
+          <p:cNvSpPr txBox="1"/>
+          <p:nvPr/>
+        </p:nvSpPr>
+        <p:spPr>
+          <a:xfrm>
+            <a:off x="502920" y="310896"/>
+            <a:ext cx="7223760" cy="347472"/>
+          </a:xfrm>
+          <a:prstGeom prst="rect">
+            <a:avLst/>
+          </a:prstGeom>
+          <a:noFill/>
+        </p:spPr>
+        <p:txBody>
+          <a:bodyPr wrap="none">
+            <a:spAutoFit/>
+          </a:bodyPr>
+          <a:lstStyle/>
+          <a:p>
+            <a:pPr>
+              <a:defRPr sz="2400" b="1">
+                <a:solidFill>
+                  <a:srgbClr val="FFFFFF"/>
+                </a:solidFill>
+              </a:defRPr>
+            </a:pPr>
+            <a:r>
+              <a:t>Summary</a:t>
+            </a:r>
+          </a:p>
+        </p:txBody>
+      </p:sp>
+      <p:sp>
+        <p:nvSpPr>
+          <p:cNvPr id="5" name="TextBox 4"/>
+          <p:cNvSpPr txBox="1"/>
+          <p:nvPr/>
+        </p:nvSpPr>
+        <p:spPr>
+          <a:xfrm>
+            <a:off x="8229600" y="201168"/>
+            <a:ext cx="411480" cy="228600"/>
+          </a:xfrm>
+          <a:prstGeom prst="rect">
+            <a:avLst/>
+          </a:prstGeom>
+          <a:noFill/>
+        </p:spPr>
+        <p:txBody>
+          <a:bodyPr wrap="none">
+            <a:spAutoFit/>
+          </a:bodyPr>
+          <a:lstStyle/>
+          <a:p>
+            <a:pPr algn="r">
+              <a:defRPr sz="1100" b="1">
+                <a:solidFill>
+                  <a:srgbClr val="B3C3D6"/>
+                </a:solidFill>
+              </a:defRPr>
+            </a:pPr>
+            <a:r>
+              <a:t>10</a:t>
             </a:r>
           </a:p>
         </p:txBody>
@@ -8604,7 +9164,7 @@
               </a:defRPr>
             </a:pPr>
             <a:r>
-              <a:t>Deployment and operations</a:t>
+              <a:t>Deployment and operations (1) — Setup and run</a:t>
             </a:r>
           </a:p>
         </p:txBody>
@@ -8652,8 +9212,8 @@
         </p:nvSpPr>
         <p:spPr>
           <a:xfrm>
-            <a:off x="640080" y="1234440"/>
-            <a:ext cx="3657600" cy="960120"/>
+            <a:off x="502920" y="1234440"/>
+            <a:ext cx="3840480" cy="1051560"/>
           </a:xfrm>
           <a:prstGeom prst="roundRect">
             <a:avLst/>
@@ -8696,31 +9256,43 @@
               </a:defRPr>
             </a:pPr>
             <a:r>
-              <a:t>AirFlows deploy</a:t>
+              <a:t>Airflow: steps</a:t>
             </a:r>
           </a:p>
           <a:p>
             <a:pPr algn="l">
-              <a:defRPr sz="1100">
+              <a:defRPr sz="900">
                 <a:solidFill>
                   <a:srgbClr val="D8E6F2"/>
                 </a:solidFill>
               </a:defRPr>
             </a:pPr>
             <a:r>
-              <a:t>Docker Compose</a:t>
+              <a:t>1. Use docker-compose (webserver, scheduler, worker, postgres, redis).</a:t>
             </a:r>
           </a:p>
           <a:p>
             <a:pPr algn="l">
-              <a:defRPr sz="1100">
+              <a:defRPr sz="900">
                 <a:solidFill>
                   <a:srgbClr val="D8E6F2"/>
                 </a:solidFill>
               </a:defRPr>
             </a:pPr>
             <a:r>
-              <a:t>webserver / scheduler / worker / postgres / redis</a:t>
+              <a:t>2. Set env: VASCULAR_CELERY_BROKER_URL=redis://vascular-redis:6379/0 for FC pipeline.</a:t>
+            </a:r>
+          </a:p>
+          <a:p>
+            <a:pPr algn="l">
+              <a:defRPr sz="900">
+                <a:solidFill>
+                  <a:srgbClr val="D8E6F2"/>
+                </a:solidFill>
+              </a:defRPr>
+            </a:pPr>
+            <a:r>
+              <a:t>3. DAGs from volume dags/ (xml_dag_factory.py + dag_definitions/*.xml).</a:t>
             </a:r>
           </a:p>
         </p:txBody>
@@ -8733,8 +9305,110 @@
         </p:nvSpPr>
         <p:spPr>
           <a:xfrm>
-            <a:off x="4572000" y="1234440"/>
-            <a:ext cx="3657600" cy="960120"/>
+            <a:off x="4526280" y="1234440"/>
+            <a:ext cx="4114800" cy="1051560"/>
+          </a:xfrm>
+          <a:prstGeom prst="roundRect">
+            <a:avLst/>
+          </a:prstGeom>
+          <a:solidFill>
+            <a:srgbClr val="295683"/>
+          </a:solidFill>
+          <a:ln w="12700">
+            <a:solidFill>
+              <a:srgbClr val="5D7B9D"/>
+            </a:solidFill>
+          </a:ln>
+        </p:spPr>
+        <p:style>
+          <a:lnRef idx="1">
+            <a:schemeClr val="accent1"/>
+          </a:lnRef>
+          <a:fillRef idx="3">
+            <a:schemeClr val="accent1"/>
+          </a:fillRef>
+          <a:effectRef idx="2">
+            <a:schemeClr val="accent1"/>
+          </a:effectRef>
+          <a:fontRef idx="minor">
+            <a:schemeClr val="lt1"/>
+          </a:fontRef>
+        </p:style>
+        <p:txBody>
+          <a:bodyPr rtlCol="0" anchor="ctr" wrap="square"/>
+          <a:lstStyle/>
+          <a:p>
+            <a:pPr algn="ctr">
+              <a:spcAft>
+                <a:spcPts val="600"/>
+              </a:spcAft>
+              <a:defRPr sz="1100" b="1">
+                <a:solidFill>
+                  <a:srgbClr val="4DB6E5"/>
+                </a:solidFill>
+              </a:defRPr>
+            </a:pPr>
+            <a:r>
+              <a:t>Example: run Airflow stack</a:t>
+            </a:r>
+          </a:p>
+          <a:p>
+            <a:pPr>
+              <a:spcAft>
+                <a:spcPts val="200"/>
+              </a:spcAft>
+              <a:defRPr sz="1100">
+                <a:solidFill>
+                  <a:srgbClr val="D8E6F2"/>
+                </a:solidFill>
+              </a:defRPr>
+            </a:pPr>
+            <a:r>
+              <a:t>cd AirFlows_P</a:t>
+            </a:r>
+          </a:p>
+          <a:p>
+            <a:pPr>
+              <a:spcAft>
+                <a:spcPts val="200"/>
+              </a:spcAft>
+              <a:defRPr sz="1100">
+                <a:solidFill>
+                  <a:srgbClr val="D8E6F2"/>
+                </a:solidFill>
+              </a:defRPr>
+            </a:pPr>
+            <a:r>
+              <a:t>docker compose up -d</a:t>
+            </a:r>
+          </a:p>
+          <a:p>
+            <a:pPr>
+              <a:spcAft>
+                <a:spcPts val="200"/>
+              </a:spcAft>
+              <a:defRPr sz="1100">
+                <a:solidFill>
+                  <a:srgbClr val="D8E6F2"/>
+                </a:solidFill>
+              </a:defRPr>
+            </a:pPr>
+            <a:r>
+              <a:t>Open http://localhost:8080</a:t>
+            </a:r>
+          </a:p>
+        </p:txBody>
+      </p:sp>
+      <p:sp>
+        <p:nvSpPr>
+          <p:cNvPr id="8" name="Rounded Rectangle 7"/>
+          <p:cNvSpPr/>
+          <p:nvPr/>
+        </p:nvSpPr>
+        <p:spPr>
+          <a:xfrm>
+            <a:off x="502920" y="2468880"/>
+            <a:ext cx="3840480" cy="1097280"/>
           </a:xfrm>
           <a:prstGeom prst="roundRect">
             <a:avLst/>
@@ -8777,124 +9451,43 @@
               </a:defRPr>
             </a:pPr>
             <a:r>
-              <a:t>Vascular deploy</a:t>
+              <a:t>Vascular: steps</a:t>
             </a:r>
           </a:p>
           <a:p>
             <a:pPr algn="l">
-              <a:defRPr sz="1100">
+              <a:defRPr sz="900">
                 <a:solidFill>
                   <a:srgbClr val="D8E6F2"/>
                 </a:solidFill>
               </a:defRPr>
             </a:pPr>
             <a:r>
-              <a:t>Config/data-only -&gt; volume sync</a:t>
+              <a:t>1. Build base image: docker build -f Base_Image_Docker_File -t vascular_base .</a:t>
             </a:r>
           </a:p>
           <a:p>
             <a:pPr algn="l">
-              <a:defRPr sz="1100">
+              <a:defRPr sz="900">
                 <a:solidFill>
                   <a:srgbClr val="D8E6F2"/>
                 </a:solidFill>
               </a:defRPr>
             </a:pPr>
             <a:r>
-              <a:t>Code change -&gt; rebuild containers</a:t>
-            </a:r>
-          </a:p>
-        </p:txBody>
-      </p:sp>
-      <p:sp>
-        <p:nvSpPr>
-          <p:cNvPr id="8" name="Rounded Rectangle 7"/>
-          <p:cNvSpPr/>
-          <p:nvPr/>
-        </p:nvSpPr>
-        <p:spPr>
-          <a:xfrm>
-            <a:off x="640080" y="2514600"/>
-            <a:ext cx="3657600" cy="960120"/>
-          </a:xfrm>
-          <a:prstGeom prst="roundRect">
-            <a:avLst/>
-          </a:prstGeom>
-          <a:solidFill>
-            <a:srgbClr val="22476B"/>
-          </a:solidFill>
-          <a:ln w="12700">
-            <a:solidFill>
-              <a:srgbClr val="5D7B9D"/>
-            </a:solidFill>
-          </a:ln>
-        </p:spPr>
-        <p:style>
-          <a:lnRef idx="1">
-            <a:schemeClr val="accent1"/>
-          </a:lnRef>
-          <a:fillRef idx="3">
-            <a:schemeClr val="accent1"/>
-          </a:fillRef>
-          <a:effectRef idx="2">
-            <a:schemeClr val="accent1"/>
-          </a:effectRef>
-          <a:fontRef idx="minor">
-            <a:schemeClr val="lt1"/>
-          </a:fontRef>
-        </p:style>
-        <p:txBody>
-          <a:bodyPr rtlCol="0" anchor="t" wrap="square"/>
-          <a:lstStyle/>
+              <a:t>2. Create shared network: docker network create airflow_shared_net</a:t>
+            </a:r>
+          </a:p>
           <a:p>
             <a:pPr algn="l">
-              <a:spcAft>
-                <a:spcPts val="800"/>
-              </a:spcAft>
-              <a:defRPr sz="1300" b="1">
-                <a:solidFill>
-                  <a:srgbClr val="FFFFFF"/>
-                </a:solidFill>
-              </a:defRPr>
-            </a:pPr>
-            <a:r>
-              <a:t>Config and volumes</a:t>
-            </a:r>
-          </a:p>
-          <a:p>
-            <a:pPr algn="l">
-              <a:defRPr sz="1100">
+              <a:defRPr sz="900">
                 <a:solidFill>
                   <a:srgbClr val="D8E6F2"/>
                 </a:solidFill>
               </a:defRPr>
             </a:pPr>
             <a:r>
-              <a:t>vascular-configs</a:t>
-            </a:r>
-          </a:p>
-          <a:p>
-            <a:pPr algn="l">
-              <a:defRPr sz="1100">
-                <a:solidFill>
-                  <a:srgbClr val="D8E6F2"/>
-                </a:solidFill>
-              </a:defRPr>
-            </a:pPr>
-            <a:r>
-              <a:t>vascular-data</a:t>
-            </a:r>
-          </a:p>
-          <a:p>
-            <a:pPr algn="l">
-              <a:defRPr sz="1100">
-                <a:solidFill>
-                  <a:srgbClr val="D8E6F2"/>
-                </a:solidFill>
-              </a:defRPr>
-            </a:pPr>
-            <a:r>
-              <a:t>Named Volumes only</a:t>
+              <a:t>3. Run: docker compose up -d --build (API on 8000, worker + redis).</a:t>
             </a:r>
           </a:p>
         </p:txBody>
@@ -8907,8 +9500,8 @@
         </p:nvSpPr>
         <p:spPr>
           <a:xfrm>
-            <a:off x="4572000" y="2514600"/>
-            <a:ext cx="3657600" cy="960120"/>
+            <a:off x="4526280" y="2468880"/>
+            <a:ext cx="4114800" cy="1097280"/>
           </a:xfrm>
           <a:prstGeom prst="roundRect">
             <a:avLst/>
@@ -8937,6 +9530,108 @@
           </a:fontRef>
         </p:style>
         <p:txBody>
+          <a:bodyPr rtlCol="0" anchor="ctr" wrap="square"/>
+          <a:lstStyle/>
+          <a:p>
+            <a:pPr algn="ctr">
+              <a:spcAft>
+                <a:spcPts val="600"/>
+              </a:spcAft>
+              <a:defRPr sz="1100" b="1">
+                <a:solidFill>
+                  <a:srgbClr val="4DB6E5"/>
+                </a:solidFill>
+              </a:defRPr>
+            </a:pPr>
+            <a:r>
+              <a:t>Example: run Vascular</a:t>
+            </a:r>
+          </a:p>
+          <a:p>
+            <a:pPr>
+              <a:spcAft>
+                <a:spcPts val="200"/>
+              </a:spcAft>
+              <a:defRPr sz="1100">
+                <a:solidFill>
+                  <a:srgbClr val="D8E6F2"/>
+                </a:solidFill>
+              </a:defRPr>
+            </a:pPr>
+            <a:r>
+              <a:t>cd Vascular_P</a:t>
+            </a:r>
+          </a:p>
+          <a:p>
+            <a:pPr>
+              <a:spcAft>
+                <a:spcPts val="200"/>
+              </a:spcAft>
+              <a:defRPr sz="1100">
+                <a:solidFill>
+                  <a:srgbClr val="D8E6F2"/>
+                </a:solidFill>
+              </a:defRPr>
+            </a:pPr>
+            <a:r>
+              <a:t>docker compose up -d --build</a:t>
+            </a:r>
+          </a:p>
+          <a:p>
+            <a:pPr>
+              <a:spcAft>
+                <a:spcPts val="200"/>
+              </a:spcAft>
+              <a:defRPr sz="1100">
+                <a:solidFill>
+                  <a:srgbClr val="D8E6F2"/>
+                </a:solidFill>
+              </a:defRPr>
+            </a:pPr>
+            <a:r>
+              <a:t>API: http://localhost:8000  |  Docs: http://localhost:8000/docs</a:t>
+            </a:r>
+          </a:p>
+        </p:txBody>
+      </p:sp>
+      <p:sp>
+        <p:nvSpPr>
+          <p:cNvPr id="10" name="Rounded Rectangle 9"/>
+          <p:cNvSpPr/>
+          <p:nvPr/>
+        </p:nvSpPr>
+        <p:spPr>
+          <a:xfrm>
+            <a:off x="502920" y="3794760"/>
+            <a:ext cx="8183879" cy="685800"/>
+          </a:xfrm>
+          <a:prstGeom prst="roundRect">
+            <a:avLst/>
+          </a:prstGeom>
+          <a:solidFill>
+            <a:srgbClr val="295683"/>
+          </a:solidFill>
+          <a:ln w="12700">
+            <a:solidFill>
+              <a:srgbClr val="5D7B9D"/>
+            </a:solidFill>
+          </a:ln>
+        </p:spPr>
+        <p:style>
+          <a:lnRef idx="1">
+            <a:schemeClr val="accent1"/>
+          </a:lnRef>
+          <a:fillRef idx="3">
+            <a:schemeClr val="accent1"/>
+          </a:fillRef>
+          <a:effectRef idx="2">
+            <a:schemeClr val="accent1"/>
+          </a:effectRef>
+          <a:fontRef idx="minor">
+            <a:schemeClr val="lt1"/>
+          </a:fontRef>
+        </p:style>
+        <p:txBody>
           <a:bodyPr rtlCol="0" anchor="t" wrap="square"/>
           <a:lstStyle/>
           <a:p>
@@ -8951,50 +9646,38 @@
               </a:defRPr>
             </a:pPr>
             <a:r>
-              <a:t>Monitoring focus</a:t>
+              <a:t>Key setting for Airflow–Vascular link</a:t>
             </a:r>
           </a:p>
           <a:p>
             <a:pPr algn="l">
-              <a:defRPr sz="1100">
+              <a:defRPr sz="900">
                 <a:solidFill>
                   <a:srgbClr val="D8E6F2"/>
                 </a:solidFill>
               </a:defRPr>
             </a:pPr>
             <a:r>
-              <a:t>Airflow UI</a:t>
+              <a:t>FC pipeline (shared broker): set VASCULAR_CELERY_BROKER_URL on scheduler/worker to Vascular Redis.</a:t>
             </a:r>
           </a:p>
           <a:p>
             <a:pPr algn="l">
-              <a:defRPr sz="1100">
+              <a:defRPr sz="900">
                 <a:solidFill>
                   <a:srgbClr val="D8E6F2"/>
                 </a:solidFill>
               </a:defRPr>
             </a:pPr>
             <a:r>
-              <a:t>Celery worker</a:t>
-            </a:r>
-          </a:p>
-          <a:p>
-            <a:pPr algn="l">
-              <a:defRPr sz="1100">
-                <a:solidFill>
-                  <a:srgbClr val="D8E6F2"/>
-                </a:solidFill>
-              </a:defRPr>
-            </a:pPr>
-            <a:r>
-              <a:t>Redis / PipelineContext</a:t>
-            </a:r>
-          </a:p>
-        </p:txBody>
-      </p:sp>
-      <p:sp>
-        <p:nvSpPr>
-          <p:cNvPr id="10" name="TextBox 9"/>
+              <a:t>Option A (HTTP): no shared broker; in XML use trigger url="http://vascular-api:8000/..." instead.</a:t>
+            </a:r>
+          </a:p>
+        </p:txBody>
+      </p:sp>
+      <p:sp>
+        <p:nvSpPr>
+          <p:cNvPr id="11" name="TextBox 10"/>
           <p:cNvSpPr txBox="1"/>
           <p:nvPr/>
         </p:nvSpPr>
@@ -9022,7 +9705,7 @@
               </a:defRPr>
             </a:pPr>
             <a:r>
-              <a:t>AirFlows and Vascular overview</a:t>
+              <a:t>See OPERATION_GUIDE.md for full steps and prerequisites.</a:t>
             </a:r>
           </a:p>
         </p:txBody>
@@ -9128,7 +9811,7 @@
               </a:defRPr>
             </a:pPr>
             <a:r>
-              <a:t>ROADMAP</a:t>
+              <a:t>OPERATIONS</a:t>
             </a:r>
           </a:p>
         </p:txBody>
@@ -9163,7 +9846,7 @@
               </a:defRPr>
             </a:pPr>
             <a:r>
-              <a:t>Future development (TBC)</a:t>
+              <a:t>Deployment and operations (2) — Config and usage</a:t>
             </a:r>
           </a:p>
         </p:txBody>
@@ -9211,8 +9894,89 @@
         </p:nvSpPr>
         <p:spPr>
           <a:xfrm>
-            <a:off x="640080" y="1325880"/>
-            <a:ext cx="2377440" cy="1325880"/>
+            <a:off x="502920" y="1234440"/>
+            <a:ext cx="3657600" cy="914400"/>
+          </a:xfrm>
+          <a:prstGeom prst="roundRect">
+            <a:avLst/>
+          </a:prstGeom>
+          <a:solidFill>
+            <a:srgbClr val="22476B"/>
+          </a:solidFill>
+          <a:ln w="12700">
+            <a:solidFill>
+              <a:srgbClr val="5D7B9D"/>
+            </a:solidFill>
+          </a:ln>
+        </p:spPr>
+        <p:style>
+          <a:lnRef idx="1">
+            <a:schemeClr val="accent1"/>
+          </a:lnRef>
+          <a:fillRef idx="3">
+            <a:schemeClr val="accent1"/>
+          </a:fillRef>
+          <a:effectRef idx="2">
+            <a:schemeClr val="accent1"/>
+          </a:effectRef>
+          <a:fontRef idx="minor">
+            <a:schemeClr val="lt1"/>
+          </a:fontRef>
+        </p:style>
+        <p:txBody>
+          <a:bodyPr rtlCol="0" anchor="t" wrap="square"/>
+          <a:lstStyle/>
+          <a:p>
+            <a:pPr algn="l">
+              <a:spcAft>
+                <a:spcPts val="800"/>
+              </a:spcAft>
+              <a:defRPr sz="1300" b="1">
+                <a:solidFill>
+                  <a:srgbClr val="FFFFFF"/>
+                </a:solidFill>
+              </a:defRPr>
+            </a:pPr>
+            <a:r>
+              <a:t>Volumes (Vascular)</a:t>
+            </a:r>
+          </a:p>
+          <a:p>
+            <a:pPr algn="l">
+              <a:defRPr sz="900">
+                <a:solidFill>
+                  <a:srgbClr val="D8E6F2"/>
+                </a:solidFill>
+              </a:defRPr>
+            </a:pPr>
+            <a:r>
+              <a:t>vascular-configs -&gt; /app/configs (email_config.json, file_confirmation, datasource, sybase_config).</a:t>
+            </a:r>
+          </a:p>
+          <a:p>
+            <a:pPr algn="l">
+              <a:defRPr sz="900">
+                <a:solidFill>
+                  <a:srgbClr val="D8E6F2"/>
+                </a:solidFill>
+              </a:defRPr>
+            </a:pPr>
+            <a:r>
+              <a:t>vascular-data -&gt; /app/data (e.g. data/sql/file_confirmation). Use Named Volumes only.</a:t>
+            </a:r>
+          </a:p>
+        </p:txBody>
+      </p:sp>
+      <p:sp>
+        <p:nvSpPr>
+          <p:cNvPr id="7" name="Rounded Rectangle 6"/>
+          <p:cNvSpPr/>
+          <p:nvPr/>
+        </p:nvSpPr>
+        <p:spPr>
+          <a:xfrm>
+            <a:off x="4343400" y="1234440"/>
+            <a:ext cx="4343400" cy="914400"/>
           </a:xfrm>
           <a:prstGeom prst="roundRect">
             <a:avLst/>
@@ -9255,11 +10019,95 @@
               </a:defRPr>
             </a:pPr>
             <a:r>
-              <a:t>Prometheus</a:t>
+              <a:t>CI behaviour</a:t>
             </a:r>
           </a:p>
           <a:p>
             <a:pPr algn="l">
+              <a:defRPr sz="900">
+                <a:solidFill>
+                  <a:srgbClr val="D8E6F2"/>
+                </a:solidFill>
+              </a:defRPr>
+            </a:pPr>
+            <a:r>
+              <a:t>Config/data-only change: sync files into volumes only (no rebuild, no restart).</a:t>
+            </a:r>
+          </a:p>
+          <a:p>
+            <a:pPr algn="l">
+              <a:defRPr sz="900">
+                <a:solidFill>
+                  <a:srgbClr val="D8E6F2"/>
+                </a:solidFill>
+              </a:defRPr>
+            </a:pPr>
+            <a:r>
+              <a:t>Code or Dockerfile change: docker compose build + up -d, then sync volumes.</a:t>
+            </a:r>
+          </a:p>
+        </p:txBody>
+      </p:sp>
+      <p:sp>
+        <p:nvSpPr>
+          <p:cNvPr id="8" name="Rounded Rectangle 7"/>
+          <p:cNvSpPr/>
+          <p:nvPr/>
+        </p:nvSpPr>
+        <p:spPr>
+          <a:xfrm>
+            <a:off x="502920" y="2331720"/>
+            <a:ext cx="8183879" cy="1417320"/>
+          </a:xfrm>
+          <a:prstGeom prst="roundRect">
+            <a:avLst/>
+          </a:prstGeom>
+          <a:solidFill>
+            <a:srgbClr val="295683"/>
+          </a:solidFill>
+          <a:ln w="12700">
+            <a:solidFill>
+              <a:srgbClr val="5D7B9D"/>
+            </a:solidFill>
+          </a:ln>
+        </p:spPr>
+        <p:style>
+          <a:lnRef idx="1">
+            <a:schemeClr val="accent1"/>
+          </a:lnRef>
+          <a:fillRef idx="3">
+            <a:schemeClr val="accent1"/>
+          </a:fillRef>
+          <a:effectRef idx="2">
+            <a:schemeClr val="accent1"/>
+          </a:effectRef>
+          <a:fontRef idx="minor">
+            <a:schemeClr val="lt1"/>
+          </a:fontRef>
+        </p:style>
+        <p:txBody>
+          <a:bodyPr rtlCol="0" anchor="ctr" wrap="square"/>
+          <a:lstStyle/>
+          <a:p>
+            <a:pPr algn="ctr">
+              <a:spcAft>
+                <a:spcPts val="600"/>
+              </a:spcAft>
+              <a:defRPr sz="1100" b="1">
+                <a:solidFill>
+                  <a:srgbClr val="4DB6E5"/>
+                </a:solidFill>
+              </a:defRPr>
+            </a:pPr>
+            <a:r>
+              <a:t>Example: Airflow XML DAG triggering Vascular via HTTP (Option A)</a:t>
+            </a:r>
+          </a:p>
+          <a:p>
+            <a:pPr>
+              <a:spcAft>
+                <a:spcPts val="200"/>
+              </a:spcAft>
               <a:defRPr sz="1100">
                 <a:solidFill>
                   <a:srgbClr val="D8E6F2"/>
@@ -9267,11 +10115,14 @@
               </a:defRPr>
             </a:pPr>
             <a:r>
-              <a:t>Metrics</a:t>
-            </a:r>
-          </a:p>
-          <a:p>
-            <a:pPr algn="l">
+              <a:t>&lt;dag id="vascular_via_api" schedule="0 8 * * *" description="Trigger Vascular via API"&gt;</a:t>
+            </a:r>
+          </a:p>
+          <a:p>
+            <a:pPr>
+              <a:spcAft>
+                <a:spcPts val="200"/>
+              </a:spcAft>
               <a:defRPr sz="1100">
                 <a:solidFill>
                   <a:srgbClr val="D8E6F2"/>
@@ -9279,11 +10130,14 @@
               </a:defRPr>
             </a:pPr>
             <a:r>
-              <a:t>Port 9090</a:t>
-            </a:r>
-          </a:p>
-          <a:p>
-            <a:pPr algn="l">
+              <a:t>  &lt;trigger url="http://vascular-api:8000/api/v1/communicators/process" method="post"/&gt;</a:t>
+            </a:r>
+          </a:p>
+          <a:p>
+            <a:pPr>
+              <a:spcAft>
+                <a:spcPts val="200"/>
+              </a:spcAft>
               <a:defRPr sz="1100">
                 <a:solidFill>
                   <a:srgbClr val="D8E6F2"/>
@@ -9291,21 +10145,36 @@
               </a:defRPr>
             </a:pPr>
             <a:r>
-              <a:t>Time-series storage</a:t>
-            </a:r>
-          </a:p>
-        </p:txBody>
-      </p:sp>
-      <p:sp>
-        <p:nvSpPr>
-          <p:cNvPr id="7" name="Rounded Rectangle 6"/>
+              <a:t>&lt;/dag&gt;</a:t>
+            </a:r>
+          </a:p>
+          <a:p>
+            <a:pPr>
+              <a:spcAft>
+                <a:spcPts val="200"/>
+              </a:spcAft>
+              <a:defRPr sz="1100">
+                <a:solidFill>
+                  <a:srgbClr val="D8E6F2"/>
+                </a:solidFill>
+              </a:defRPr>
+            </a:pPr>
+            <a:r>
+              <a:t>Place in dag_definitions/*.xml. No VASCULAR_CELERY_BROKER_URL needed; Vascular uses its own Redis.</a:t>
+            </a:r>
+          </a:p>
+        </p:txBody>
+      </p:sp>
+      <p:sp>
+        <p:nvSpPr>
+          <p:cNvPr id="9" name="Rounded Rectangle 8"/>
           <p:cNvSpPr/>
           <p:nvPr/>
         </p:nvSpPr>
         <p:spPr>
           <a:xfrm>
-            <a:off x="3383280" y="1325880"/>
-            <a:ext cx="2377440" cy="1325880"/>
+            <a:off x="502920" y="3977639"/>
+            <a:ext cx="4023360" cy="822960"/>
           </a:xfrm>
           <a:prstGeom prst="roundRect">
             <a:avLst/>
@@ -9348,57 +10217,45 @@
               </a:defRPr>
             </a:pPr>
             <a:r>
-              <a:t>Loki</a:t>
+              <a:t>Monitoring</a:t>
             </a:r>
           </a:p>
           <a:p>
             <a:pPr algn="l">
-              <a:defRPr sz="1100">
+              <a:defRPr sz="900">
                 <a:solidFill>
                   <a:srgbClr val="D8E6F2"/>
                 </a:solidFill>
               </a:defRPr>
             </a:pPr>
             <a:r>
-              <a:t>Logs</a:t>
+              <a:t>Airflow UI: 12 tasks per FC run (6 send + 6 wait). Filter by DAG or tags (e.g. vascular, fc).</a:t>
             </a:r>
           </a:p>
           <a:p>
             <a:pPr algn="l">
-              <a:defRPr sz="1100">
+              <a:defRPr sz="900">
                 <a:solidFill>
                   <a:srgbClr val="D8E6F2"/>
                 </a:solidFill>
               </a:defRPr>
             </a:pPr>
             <a:r>
-              <a:t>Port 3100</a:t>
-            </a:r>
-          </a:p>
-          <a:p>
-            <a:pPr algn="l">
-              <a:defRPr sz="1100">
-                <a:solidFill>
-                  <a:srgbClr val="D8E6F2"/>
-                </a:solidFill>
-              </a:defRPr>
-            </a:pPr>
-            <a:r>
-              <a:t>Query by stream</a:t>
-            </a:r>
-          </a:p>
-        </p:txBody>
-      </p:sp>
-      <p:sp>
-        <p:nvSpPr>
-          <p:cNvPr id="8" name="Rounded Rectangle 7"/>
+              <a:t>Ensure vascular-worker is up; check Redis / PipelineContext if a step fails.</a:t>
+            </a:r>
+          </a:p>
+        </p:txBody>
+      </p:sp>
+      <p:sp>
+        <p:nvSpPr>
+          <p:cNvPr id="10" name="Rounded Rectangle 9"/>
           <p:cNvSpPr/>
           <p:nvPr/>
         </p:nvSpPr>
         <p:spPr>
           <a:xfrm>
-            <a:off x="6126480" y="1325880"/>
-            <a:ext cx="2377440" cy="1325880"/>
+            <a:off x="4663440" y="3977639"/>
+            <a:ext cx="4023360" cy="822960"/>
           </a:xfrm>
           <a:prstGeom prst="roundRect">
             <a:avLst/>
@@ -9441,119 +10298,38 @@
               </a:defRPr>
             </a:pPr>
             <a:r>
-              <a:t>Grafana</a:t>
+              <a:t>After config change</a:t>
             </a:r>
           </a:p>
           <a:p>
             <a:pPr algn="l">
-              <a:defRPr sz="1100">
+              <a:defRPr sz="900">
                 <a:solidFill>
                   <a:srgbClr val="D8E6F2"/>
                 </a:solidFill>
               </a:defRPr>
             </a:pPr>
             <a:r>
-              <a:t>Dashboards</a:t>
+              <a:t>Config/data-only: redeploy runs volume sync; restart worker if app must reload config.</a:t>
             </a:r>
           </a:p>
           <a:p>
             <a:pPr algn="l">
-              <a:defRPr sz="1100">
+              <a:defRPr sz="900">
                 <a:solidFill>
                   <a:srgbClr val="D8E6F2"/>
                 </a:solidFill>
               </a:defRPr>
             </a:pPr>
             <a:r>
-              <a:t>Port 3000</a:t>
-            </a:r>
-          </a:p>
-          <a:p>
-            <a:pPr algn="l">
-              <a:defRPr sz="1100">
-                <a:solidFill>
-                  <a:srgbClr val="D8E6F2"/>
-                </a:solidFill>
-              </a:defRPr>
-            </a:pPr>
-            <a:r>
-              <a:t>Single UI</a:t>
-            </a:r>
-          </a:p>
-        </p:txBody>
-      </p:sp>
-      <p:sp>
-        <p:nvSpPr>
-          <p:cNvPr id="9" name="Rounded Rectangle 8"/>
-          <p:cNvSpPr/>
-          <p:nvPr/>
-        </p:nvSpPr>
-        <p:spPr>
-          <a:xfrm>
-            <a:off x="1371600" y="3154680"/>
-            <a:ext cx="6400800" cy="914400"/>
-          </a:xfrm>
-          <a:prstGeom prst="roundRect">
-            <a:avLst/>
-          </a:prstGeom>
-          <a:solidFill>
-            <a:srgbClr val="22476B"/>
-          </a:solidFill>
-          <a:ln w="12700">
-            <a:solidFill>
-              <a:srgbClr val="5D7B9D"/>
-            </a:solidFill>
-          </a:ln>
-        </p:spPr>
-        <p:style>
-          <a:lnRef idx="1">
-            <a:schemeClr val="accent1"/>
-          </a:lnRef>
-          <a:fillRef idx="3">
-            <a:schemeClr val="accent1"/>
-          </a:fillRef>
-          <a:effectRef idx="2">
-            <a:schemeClr val="accent1"/>
-          </a:effectRef>
-          <a:fontRef idx="minor">
-            <a:schemeClr val="lt1"/>
-          </a:fontRef>
-        </p:style>
-        <p:txBody>
-          <a:bodyPr rtlCol="0" anchor="t" wrap="square"/>
-          <a:lstStyle/>
-          <a:p>
-            <a:pPr algn="l">
-              <a:spcAft>
-                <a:spcPts val="800"/>
-              </a:spcAft>
-              <a:defRPr sz="1300" b="1">
-                <a:solidFill>
-                  <a:srgbClr val="FFFFFF"/>
-                </a:solidFill>
-              </a:defRPr>
-            </a:pPr>
-            <a:r>
-              <a:t>Planned relationship</a:t>
-            </a:r>
-          </a:p>
-          <a:p>
-            <a:pPr algn="l">
-              <a:defRPr sz="1100">
-                <a:solidFill>
-                  <a:srgbClr val="D8E6F2"/>
-                </a:solidFill>
-              </a:defRPr>
-            </a:pPr>
-            <a:r>
-              <a:t>Prometheus -&gt; Grafana  |  Loki -&gt; Grafana</a:t>
-            </a:r>
-          </a:p>
-        </p:txBody>
-      </p:sp>
-      <p:sp>
-        <p:nvSpPr>
-          <p:cNvPr id="10" name="TextBox 9"/>
+              <a:t>CI pre_production_test: DB (MySQL/Sybase) and SMTP (mailhost:25) checks.</a:t>
+            </a:r>
+          </a:p>
+        </p:txBody>
+      </p:sp>
+      <p:sp>
+        <p:nvSpPr>
+          <p:cNvPr id="11" name="TextBox 10"/>
           <p:cNvSpPr txBox="1"/>
           <p:nvPr/>
         </p:nvSpPr>
@@ -9581,7 +10357,7 @@
               </a:defRPr>
             </a:pPr>
             <a:r>
-              <a:t>AirFlows and Vascular overview</a:t>
+              <a:t>References: README, OPERATION_GUIDE.md, vascular_http_example.xml.</a:t>
             </a:r>
           </a:p>
         </p:txBody>

--- a/docs/Airflow_Vascular_Intro.pptx
+++ b/docs/Airflow_Vascular_Intro.pptx
@@ -16,6 +16,8 @@
     <p:sldId id="264" r:id="rId15"/>
     <p:sldId id="265" r:id="rId16"/>
     <p:sldId id="266" r:id="rId17"/>
+    <p:sldId id="267" r:id="rId18"/>
+    <p:sldId id="268" r:id="rId19"/>
   </p:sldIdLst>
   <p:sldSz cx="9144000" cy="6858000" type="screen4x3"/>
   <p:notesSz cx="6858000" cy="9144000"/>
@@ -3181,7 +3183,7 @@
               </a:defRPr>
             </a:pPr>
             <a:r>
-              <a:t>AirFlows and Vascular</a:t>
+              <a:t>Airflow and Vascular</a:t>
             </a:r>
           </a:p>
           <a:p>
@@ -3589,7 +3591,7 @@
               </a:defRPr>
             </a:pPr>
             <a:r>
-              <a:t>ROADMAP</a:t>
+              <a:t>OPERATIONS</a:t>
             </a:r>
           </a:p>
         </p:txBody>
@@ -3624,7 +3626,7 @@
               </a:defRPr>
             </a:pPr>
             <a:r>
-              <a:t>Future development (TBC)</a:t>
+              <a:t>Deployment and operations (3) — Example: Celery trigger</a:t>
             </a:r>
           </a:p>
         </p:txBody>
@@ -3672,8 +3674,8 @@
         </p:nvSpPr>
         <p:spPr>
           <a:xfrm>
-            <a:off x="640080" y="1325880"/>
-            <a:ext cx="2377440" cy="1325880"/>
+            <a:off x="502920" y="1234440"/>
+            <a:ext cx="2011680" cy="457200"/>
           </a:xfrm>
           <a:prstGeom prst="roundRect">
             <a:avLst/>
@@ -3702,25 +3704,260 @@
           </a:fontRef>
         </p:style>
         <p:txBody>
-          <a:bodyPr rtlCol="0" anchor="t" wrap="square"/>
-          <a:lstStyle/>
-          <a:p>
-            <a:pPr algn="l">
+          <a:bodyPr rtlCol="0" anchor="ctr" wrap="square"/>
+          <a:lstStyle/>
+          <a:p>
+            <a:pPr algn="ctr">
+              <a:defRPr sz="1300" b="1">
+                <a:solidFill>
+                  <a:srgbClr val="FFFFFF"/>
+                </a:solidFill>
+              </a:defRPr>
+            </a:pPr>
+            <a:r>
+              <a:t>Airflow scheduler</a:t>
+            </a:r>
+          </a:p>
+        </p:txBody>
+      </p:sp>
+      <p:sp>
+        <p:nvSpPr>
+          <p:cNvPr id="7" name="TextBox 6"/>
+          <p:cNvSpPr txBox="1"/>
+          <p:nvPr/>
+        </p:nvSpPr>
+        <p:spPr>
+          <a:xfrm>
+            <a:off x="2578608" y="1389888"/>
+            <a:ext cx="182880" cy="164592"/>
+          </a:xfrm>
+          <a:prstGeom prst="rect">
+            <a:avLst/>
+          </a:prstGeom>
+          <a:noFill/>
+        </p:spPr>
+        <p:txBody>
+          <a:bodyPr wrap="none">
+            <a:spAutoFit/>
+          </a:bodyPr>
+          <a:lstStyle/>
+          <a:p>
+            <a:pPr algn="ctr">
+              <a:defRPr sz="1800" b="1">
+                <a:solidFill>
+                  <a:srgbClr val="4DB6E5"/>
+                </a:solidFill>
+              </a:defRPr>
+            </a:pPr>
+            <a:r>
+              <a:t>&gt;</a:t>
+            </a:r>
+          </a:p>
+        </p:txBody>
+      </p:sp>
+      <p:sp>
+        <p:nvSpPr>
+          <p:cNvPr id="8" name="Rounded Rectangle 7"/>
+          <p:cNvSpPr/>
+          <p:nvPr/>
+        </p:nvSpPr>
+        <p:spPr>
+          <a:xfrm>
+            <a:off x="2697480" y="1234440"/>
+            <a:ext cx="2011680" cy="457200"/>
+          </a:xfrm>
+          <a:prstGeom prst="roundRect">
+            <a:avLst/>
+          </a:prstGeom>
+          <a:solidFill>
+            <a:srgbClr val="295683"/>
+          </a:solidFill>
+          <a:ln w="12700">
+            <a:solidFill>
+              <a:srgbClr val="5D7B9D"/>
+            </a:solidFill>
+          </a:ln>
+        </p:spPr>
+        <p:style>
+          <a:lnRef idx="1">
+            <a:schemeClr val="accent1"/>
+          </a:lnRef>
+          <a:fillRef idx="3">
+            <a:schemeClr val="accent1"/>
+          </a:fillRef>
+          <a:effectRef idx="2">
+            <a:schemeClr val="accent1"/>
+          </a:effectRef>
+          <a:fontRef idx="minor">
+            <a:schemeClr val="lt1"/>
+          </a:fontRef>
+        </p:style>
+        <p:txBody>
+          <a:bodyPr rtlCol="0" anchor="ctr" wrap="square"/>
+          <a:lstStyle/>
+          <a:p>
+            <a:pPr algn="ctr">
+              <a:defRPr sz="1300" b="1">
+                <a:solidFill>
+                  <a:srgbClr val="FFFFFF"/>
+                </a:solidFill>
+              </a:defRPr>
+            </a:pPr>
+            <a:r>
+              <a:t>Redis (broker)</a:t>
+            </a:r>
+          </a:p>
+        </p:txBody>
+      </p:sp>
+      <p:sp>
+        <p:nvSpPr>
+          <p:cNvPr id="9" name="TextBox 8"/>
+          <p:cNvSpPr txBox="1"/>
+          <p:nvPr/>
+        </p:nvSpPr>
+        <p:spPr>
+          <a:xfrm>
+            <a:off x="4773168" y="1389888"/>
+            <a:ext cx="182880" cy="164592"/>
+          </a:xfrm>
+          <a:prstGeom prst="rect">
+            <a:avLst/>
+          </a:prstGeom>
+          <a:noFill/>
+        </p:spPr>
+        <p:txBody>
+          <a:bodyPr wrap="none">
+            <a:spAutoFit/>
+          </a:bodyPr>
+          <a:lstStyle/>
+          <a:p>
+            <a:pPr algn="ctr">
+              <a:defRPr sz="1800" b="1">
+                <a:solidFill>
+                  <a:srgbClr val="4DB6E5"/>
+                </a:solidFill>
+              </a:defRPr>
+            </a:pPr>
+            <a:r>
+              <a:t>&gt;</a:t>
+            </a:r>
+          </a:p>
+        </p:txBody>
+      </p:sp>
+      <p:sp>
+        <p:nvSpPr>
+          <p:cNvPr id="10" name="Rounded Rectangle 9"/>
+          <p:cNvSpPr/>
+          <p:nvPr/>
+        </p:nvSpPr>
+        <p:spPr>
+          <a:xfrm>
+            <a:off x="4892040" y="1234440"/>
+            <a:ext cx="2011680" cy="457200"/>
+          </a:xfrm>
+          <a:prstGeom prst="roundRect">
+            <a:avLst/>
+          </a:prstGeom>
+          <a:solidFill>
+            <a:srgbClr val="295683"/>
+          </a:solidFill>
+          <a:ln w="12700">
+            <a:solidFill>
+              <a:srgbClr val="5D7B9D"/>
+            </a:solidFill>
+          </a:ln>
+        </p:spPr>
+        <p:style>
+          <a:lnRef idx="1">
+            <a:schemeClr val="accent1"/>
+          </a:lnRef>
+          <a:fillRef idx="3">
+            <a:schemeClr val="accent1"/>
+          </a:fillRef>
+          <a:effectRef idx="2">
+            <a:schemeClr val="accent1"/>
+          </a:effectRef>
+          <a:fontRef idx="minor">
+            <a:schemeClr val="lt1"/>
+          </a:fontRef>
+        </p:style>
+        <p:txBody>
+          <a:bodyPr rtlCol="0" anchor="ctr" wrap="square"/>
+          <a:lstStyle/>
+          <a:p>
+            <a:pPr algn="ctr">
+              <a:defRPr sz="1300" b="1">
+                <a:solidFill>
+                  <a:srgbClr val="FFFFFF"/>
+                </a:solidFill>
+              </a:defRPr>
+            </a:pPr>
+            <a:r>
+              <a:t>Vascular worker</a:t>
+            </a:r>
+          </a:p>
+        </p:txBody>
+      </p:sp>
+      <p:sp>
+        <p:nvSpPr>
+          <p:cNvPr id="11" name="Rounded Rectangle 10"/>
+          <p:cNvSpPr/>
+          <p:nvPr/>
+        </p:nvSpPr>
+        <p:spPr>
+          <a:xfrm>
+            <a:off x="502920" y="1874519"/>
+            <a:ext cx="8183879" cy="1554480"/>
+          </a:xfrm>
+          <a:prstGeom prst="roundRect">
+            <a:avLst/>
+          </a:prstGeom>
+          <a:solidFill>
+            <a:srgbClr val="295683"/>
+          </a:solidFill>
+          <a:ln w="12700">
+            <a:solidFill>
+              <a:srgbClr val="5D7B9D"/>
+            </a:solidFill>
+          </a:ln>
+        </p:spPr>
+        <p:style>
+          <a:lnRef idx="1">
+            <a:schemeClr val="accent1"/>
+          </a:lnRef>
+          <a:fillRef idx="3">
+            <a:schemeClr val="accent1"/>
+          </a:fillRef>
+          <a:effectRef idx="2">
+            <a:schemeClr val="accent1"/>
+          </a:effectRef>
+          <a:fontRef idx="minor">
+            <a:schemeClr val="lt1"/>
+          </a:fontRef>
+        </p:style>
+        <p:txBody>
+          <a:bodyPr rtlCol="0" anchor="ctr" wrap="square"/>
+          <a:lstStyle/>
+          <a:p>
+            <a:pPr algn="ctr">
               <a:spcAft>
-                <a:spcPts val="800"/>
+                <a:spcPts val="600"/>
               </a:spcAft>
-              <a:defRPr sz="1300" b="1">
-                <a:solidFill>
-                  <a:srgbClr val="FFFFFF"/>
-                </a:solidFill>
-              </a:defRPr>
-            </a:pPr>
-            <a:r>
-              <a:t>Prometheus</a:t>
-            </a:r>
-          </a:p>
-          <a:p>
-            <a:pPr algn="l">
+              <a:defRPr sz="1100" b="1">
+                <a:solidFill>
+                  <a:srgbClr val="4DB6E5"/>
+                </a:solidFill>
+              </a:defRPr>
+            </a:pPr>
+            <a:r>
+              <a:t>Example: Airflow XML DAG triggering Vascular via Celery (shared broker)</a:t>
+            </a:r>
+          </a:p>
+          <a:p>
+            <a:pPr>
+              <a:spcAft>
+                <a:spcPts val="200"/>
+              </a:spcAft>
               <a:defRPr sz="1100">
                 <a:solidFill>
                   <a:srgbClr val="D8E6F2"/>
@@ -3728,11 +3965,14 @@
               </a:defRPr>
             </a:pPr>
             <a:r>
-              <a:t>Metrics</a:t>
-            </a:r>
-          </a:p>
-          <a:p>
-            <a:pPr algn="l">
+              <a:t>&lt;dag id="vascular_trigger_processing" schedule="0 8 * * *" description="Vascular communicator processing"&gt;</a:t>
+            </a:r>
+          </a:p>
+          <a:p>
+            <a:pPr>
+              <a:spcAft>
+                <a:spcPts val="200"/>
+              </a:spcAft>
               <a:defRPr sz="1100">
                 <a:solidFill>
                   <a:srgbClr val="D8E6F2"/>
@@ -3740,11 +3980,14 @@
               </a:defRPr>
             </a:pPr>
             <a:r>
-              <a:t>Port 9090</a:t>
-            </a:r>
-          </a:p>
-          <a:p>
-            <a:pPr algn="l">
+              <a:t>  &lt;trigger type="celery" task="trigger_processing"/&gt;</a:t>
+            </a:r>
+          </a:p>
+          <a:p>
+            <a:pPr>
+              <a:spcAft>
+                <a:spcPts val="200"/>
+              </a:spcAft>
               <a:defRPr sz="1100">
                 <a:solidFill>
                   <a:srgbClr val="D8E6F2"/>
@@ -3752,21 +3995,66 @@
               </a:defRPr>
             </a:pPr>
             <a:r>
-              <a:t>Time-series storage</a:t>
-            </a:r>
-          </a:p>
-        </p:txBody>
-      </p:sp>
-      <p:sp>
-        <p:nvSpPr>
-          <p:cNvPr id="7" name="Rounded Rectangle 6"/>
+              <a:t>&lt;/dag&gt;</a:t>
+            </a:r>
+          </a:p>
+          <a:p>
+            <a:pPr>
+              <a:spcAft>
+                <a:spcPts val="200"/>
+              </a:spcAft>
+              <a:defRPr sz="1100">
+                <a:solidFill>
+                  <a:srgbClr val="D8E6F2"/>
+                </a:solidFill>
+              </a:defRPr>
+            </a:pPr>
+            <a:r>
+              <a:t>With kwargs: &lt;trigger type="celery" task="upload_document"&gt;</a:t>
+            </a:r>
+          </a:p>
+          <a:p>
+            <a:pPr>
+              <a:spcAft>
+                <a:spcPts val="200"/>
+              </a:spcAft>
+              <a:defRPr sz="1100">
+                <a:solidFill>
+                  <a:srgbClr val="D8E6F2"/>
+                </a:solidFill>
+              </a:defRPr>
+            </a:pPr>
+            <a:r>
+              <a:t>  &lt;kwargs&gt;&lt;param name="document_type"&gt;general&lt;/param&gt;&lt;/kwargs&gt;&lt;/trigger&gt;</a:t>
+            </a:r>
+          </a:p>
+          <a:p>
+            <a:pPr>
+              <a:spcAft>
+                <a:spcPts val="200"/>
+              </a:spcAft>
+              <a:defRPr sz="1100">
+                <a:solidFill>
+                  <a:srgbClr val="D8E6F2"/>
+                </a:solidFill>
+              </a:defRPr>
+            </a:pPr>
+            <a:r>
+              <a:t>Place in dag_definitions/*.xml. Requires VASCULAR_CELERY_BROKER_URL on Airflow (same Redis as Vascular).</a:t>
+            </a:r>
+          </a:p>
+        </p:txBody>
+      </p:sp>
+      <p:sp>
+        <p:nvSpPr>
+          <p:cNvPr id="12" name="Rounded Rectangle 11"/>
           <p:cNvSpPr/>
           <p:nvPr/>
         </p:nvSpPr>
         <p:spPr>
           <a:xfrm>
-            <a:off x="3383280" y="1325880"/>
-            <a:ext cx="2377440" cy="1325880"/>
+            <a:off x="502920" y="3657600"/>
+            <a:ext cx="4023360" cy="822960"/>
           </a:xfrm>
           <a:prstGeom prst="roundRect">
             <a:avLst/>
@@ -3809,57 +4097,33 @@
               </a:defRPr>
             </a:pPr>
             <a:r>
-              <a:t>Loki</a:t>
+              <a:t>Task names</a:t>
             </a:r>
           </a:p>
           <a:p>
             <a:pPr algn="l">
-              <a:defRPr sz="1100">
+              <a:defRPr sz="900">
                 <a:solidFill>
                   <a:srgbClr val="D8E6F2"/>
                 </a:solidFill>
               </a:defRPr>
             </a:pPr>
             <a:r>
-              <a:t>Logs</a:t>
-            </a:r>
-          </a:p>
-          <a:p>
-            <a:pPr algn="l">
-              <a:defRPr sz="1100">
-                <a:solidFill>
-                  <a:srgbClr val="D8E6F2"/>
-                </a:solidFill>
-              </a:defRPr>
-            </a:pPr>
-            <a:r>
-              <a:t>Port 3100</a:t>
-            </a:r>
-          </a:p>
-          <a:p>
-            <a:pPr algn="l">
-              <a:defRPr sz="1100">
-                <a:solidFill>
-                  <a:srgbClr val="D8E6F2"/>
-                </a:solidFill>
-              </a:defRPr>
-            </a:pPr>
-            <a:r>
-              <a:t>Query by stream</a:t>
-            </a:r>
-          </a:p>
-        </p:txBody>
-      </p:sp>
-      <p:sp>
-        <p:nvSpPr>
-          <p:cNvPr id="8" name="Rounded Rectangle 7"/>
+              <a:t>Examples: trigger_processing, upload_document. Must match Vascular Celery task names.</a:t>
+            </a:r>
+          </a:p>
+        </p:txBody>
+      </p:sp>
+      <p:sp>
+        <p:nvSpPr>
+          <p:cNvPr id="13" name="Rounded Rectangle 12"/>
           <p:cNvSpPr/>
           <p:nvPr/>
         </p:nvSpPr>
         <p:spPr>
           <a:xfrm>
-            <a:off x="6126480" y="1325880"/>
-            <a:ext cx="2377440" cy="1325880"/>
+            <a:off x="4663440" y="3657600"/>
+            <a:ext cx="4023360" cy="822960"/>
           </a:xfrm>
           <a:prstGeom prst="roundRect">
             <a:avLst/>
@@ -3902,119 +4166,26 @@
               </a:defRPr>
             </a:pPr>
             <a:r>
-              <a:t>Grafana</a:t>
+              <a:t>Reference</a:t>
             </a:r>
           </a:p>
           <a:p>
             <a:pPr algn="l">
-              <a:defRPr sz="1100">
+              <a:defRPr sz="900">
                 <a:solidFill>
                   <a:srgbClr val="D8E6F2"/>
                 </a:solidFill>
               </a:defRPr>
             </a:pPr>
             <a:r>
-              <a:t>Dashboards</a:t>
-            </a:r>
-          </a:p>
-          <a:p>
-            <a:pPr algn="l">
-              <a:defRPr sz="1100">
-                <a:solidFill>
-                  <a:srgbClr val="D8E6F2"/>
-                </a:solidFill>
-              </a:defRPr>
-            </a:pPr>
-            <a:r>
-              <a:t>Port 3000</a:t>
-            </a:r>
-          </a:p>
-          <a:p>
-            <a:pPr algn="l">
-              <a:defRPr sz="1100">
-                <a:solidFill>
-                  <a:srgbClr val="D8E6F2"/>
-                </a:solidFill>
-              </a:defRPr>
-            </a:pPr>
-            <a:r>
-              <a:t>Single UI</a:t>
-            </a:r>
-          </a:p>
-        </p:txBody>
-      </p:sp>
-      <p:sp>
-        <p:nvSpPr>
-          <p:cNvPr id="9" name="Rounded Rectangle 8"/>
-          <p:cNvSpPr/>
-          <p:nvPr/>
-        </p:nvSpPr>
-        <p:spPr>
-          <a:xfrm>
-            <a:off x="1371600" y="3154680"/>
-            <a:ext cx="6400800" cy="914400"/>
-          </a:xfrm>
-          <a:prstGeom prst="roundRect">
-            <a:avLst/>
-          </a:prstGeom>
-          <a:solidFill>
-            <a:srgbClr val="22476B"/>
-          </a:solidFill>
-          <a:ln w="12700">
-            <a:solidFill>
-              <a:srgbClr val="5D7B9D"/>
-            </a:solidFill>
-          </a:ln>
-        </p:spPr>
-        <p:style>
-          <a:lnRef idx="1">
-            <a:schemeClr val="accent1"/>
-          </a:lnRef>
-          <a:fillRef idx="3">
-            <a:schemeClr val="accent1"/>
-          </a:fillRef>
-          <a:effectRef idx="2">
-            <a:schemeClr val="accent1"/>
-          </a:effectRef>
-          <a:fontRef idx="minor">
-            <a:schemeClr val="lt1"/>
-          </a:fontRef>
-        </p:style>
-        <p:txBody>
-          <a:bodyPr rtlCol="0" anchor="t" wrap="square"/>
-          <a:lstStyle/>
-          <a:p>
-            <a:pPr algn="l">
-              <a:spcAft>
-                <a:spcPts val="800"/>
-              </a:spcAft>
-              <a:defRPr sz="1300" b="1">
-                <a:solidFill>
-                  <a:srgbClr val="FFFFFF"/>
-                </a:solidFill>
-              </a:defRPr>
-            </a:pPr>
-            <a:r>
-              <a:t>Planned relationship</a:t>
-            </a:r>
-          </a:p>
-          <a:p>
-            <a:pPr algn="l">
-              <a:defRPr sz="1100">
-                <a:solidFill>
-                  <a:srgbClr val="D8E6F2"/>
-                </a:solidFill>
-              </a:defRPr>
-            </a:pPr>
-            <a:r>
-              <a:t>Prometheus -&gt; Grafana  |  Loki -&gt; Grafana</a:t>
-            </a:r>
-          </a:p>
-        </p:txBody>
-      </p:sp>
-      <p:sp>
-        <p:nvSpPr>
-          <p:cNvPr id="10" name="TextBox 9"/>
+              <a:t>See vascular_celery_example.xml for full examples.</a:t>
+            </a:r>
+          </a:p>
+        </p:txBody>
+      </p:sp>
+      <p:sp>
+        <p:nvSpPr>
+          <p:cNvPr id="14" name="TextBox 13"/>
           <p:cNvSpPr txBox="1"/>
           <p:nvPr/>
         </p:nvSpPr>
@@ -4042,7 +4213,7 @@
               </a:defRPr>
             </a:pPr>
             <a:r>
-              <a:t>AirFlows and Vascular overview</a:t>
+              <a:t>References: README, OPERATION_GUIDE.md, vascular_celery_example.xml.</a:t>
             </a:r>
           </a:p>
         </p:txBody>
@@ -4148,7 +4319,7 @@
               </a:defRPr>
             </a:pPr>
             <a:r>
-              <a:t>CLOSE</a:t>
+              <a:t>OPERATIONS</a:t>
             </a:r>
           </a:p>
         </p:txBody>
@@ -4183,7 +4354,7 @@
               </a:defRPr>
             </a:pPr>
             <a:r>
-              <a:t>Summary</a:t>
+              <a:t>Deployment and operations (4) — Monitoring and changes</a:t>
             </a:r>
           </a:p>
         </p:txBody>
@@ -4231,8 +4402,89 @@
         </p:nvSpPr>
         <p:spPr>
           <a:xfrm>
-            <a:off x="640080" y="1417320"/>
-            <a:ext cx="2423160" cy="1417320"/>
+            <a:off x="502920" y="1234440"/>
+            <a:ext cx="4023360" cy="1051560"/>
+          </a:xfrm>
+          <a:prstGeom prst="roundRect">
+            <a:avLst/>
+          </a:prstGeom>
+          <a:solidFill>
+            <a:srgbClr val="22476B"/>
+          </a:solidFill>
+          <a:ln w="12700">
+            <a:solidFill>
+              <a:srgbClr val="5D7B9D"/>
+            </a:solidFill>
+          </a:ln>
+        </p:spPr>
+        <p:style>
+          <a:lnRef idx="1">
+            <a:schemeClr val="accent1"/>
+          </a:lnRef>
+          <a:fillRef idx="3">
+            <a:schemeClr val="accent1"/>
+          </a:fillRef>
+          <a:effectRef idx="2">
+            <a:schemeClr val="accent1"/>
+          </a:effectRef>
+          <a:fontRef idx="minor">
+            <a:schemeClr val="lt1"/>
+          </a:fontRef>
+        </p:style>
+        <p:txBody>
+          <a:bodyPr rtlCol="0" anchor="t" wrap="square"/>
+          <a:lstStyle/>
+          <a:p>
+            <a:pPr algn="l">
+              <a:spcAft>
+                <a:spcPts val="800"/>
+              </a:spcAft>
+              <a:defRPr sz="1300" b="1">
+                <a:solidFill>
+                  <a:srgbClr val="FFFFFF"/>
+                </a:solidFill>
+              </a:defRPr>
+            </a:pPr>
+            <a:r>
+              <a:t>Monitoring</a:t>
+            </a:r>
+          </a:p>
+          <a:p>
+            <a:pPr algn="l">
+              <a:defRPr sz="900">
+                <a:solidFill>
+                  <a:srgbClr val="D8E6F2"/>
+                </a:solidFill>
+              </a:defRPr>
+            </a:pPr>
+            <a:r>
+              <a:t>Airflow UI: 12 tasks per FC run (6 send + 6 wait). Filter by DAG or tags (e.g. vascular, fc).</a:t>
+            </a:r>
+          </a:p>
+          <a:p>
+            <a:pPr algn="l">
+              <a:defRPr sz="900">
+                <a:solidFill>
+                  <a:srgbClr val="D8E6F2"/>
+                </a:solidFill>
+              </a:defRPr>
+            </a:pPr>
+            <a:r>
+              <a:t>Ensure vascular-worker is up; check Redis / PipelineContext if a step fails.</a:t>
+            </a:r>
+          </a:p>
+        </p:txBody>
+      </p:sp>
+      <p:sp>
+        <p:nvSpPr>
+          <p:cNvPr id="7" name="Rounded Rectangle 6"/>
+          <p:cNvSpPr/>
+          <p:nvPr/>
+        </p:nvSpPr>
+        <p:spPr>
+          <a:xfrm>
+            <a:off x="4663440" y="1234440"/>
+            <a:ext cx="4023360" cy="1051560"/>
           </a:xfrm>
           <a:prstGeom prst="roundRect">
             <a:avLst/>
@@ -4261,10 +4513,10 @@
           </a:fontRef>
         </p:style>
         <p:txBody>
-          <a:bodyPr rtlCol="0" anchor="ctr" wrap="square"/>
-          <a:lstStyle/>
-          <a:p>
-            <a:pPr algn="ctr">
+          <a:bodyPr rtlCol="0" anchor="t" wrap="square"/>
+          <a:lstStyle/>
+          <a:p>
+            <a:pPr algn="l">
               <a:spcAft>
                 <a:spcPts val="800"/>
               </a:spcAft>
@@ -4275,57 +4527,331 @@
               </a:defRPr>
             </a:pPr>
             <a:r>
-              <a:t>AirFlows</a:t>
-            </a:r>
-          </a:p>
+              <a:t>After config change</a:t>
+            </a:r>
+          </a:p>
+          <a:p>
+            <a:pPr algn="l">
+              <a:defRPr sz="900">
+                <a:solidFill>
+                  <a:srgbClr val="D8E6F2"/>
+                </a:solidFill>
+              </a:defRPr>
+            </a:pPr>
+            <a:r>
+              <a:t>Config/data-only: redeploy runs volume sync; restart worker if app must reload config.</a:t>
+            </a:r>
+          </a:p>
+          <a:p>
+            <a:pPr algn="l">
+              <a:defRPr sz="900">
+                <a:solidFill>
+                  <a:srgbClr val="D8E6F2"/>
+                </a:solidFill>
+              </a:defRPr>
+            </a:pPr>
+            <a:r>
+              <a:t>CI pre_production_test: DB (MySQL/Sybase) and SMTP (mailhost:25) checks.</a:t>
+            </a:r>
+          </a:p>
+        </p:txBody>
+      </p:sp>
+      <p:sp>
+        <p:nvSpPr>
+          <p:cNvPr id="8" name="Rounded Rectangle 7"/>
+          <p:cNvSpPr/>
+          <p:nvPr/>
+        </p:nvSpPr>
+        <p:spPr>
+          <a:xfrm>
+            <a:off x="502920" y="2514600"/>
+            <a:ext cx="2286000" cy="457200"/>
+          </a:xfrm>
+          <a:prstGeom prst="roundRect">
+            <a:avLst/>
+          </a:prstGeom>
+          <a:solidFill>
+            <a:srgbClr val="295683"/>
+          </a:solidFill>
+          <a:ln w="12700">
+            <a:solidFill>
+              <a:srgbClr val="5D7B9D"/>
+            </a:solidFill>
+          </a:ln>
+        </p:spPr>
+        <p:style>
+          <a:lnRef idx="1">
+            <a:schemeClr val="accent1"/>
+          </a:lnRef>
+          <a:fillRef idx="3">
+            <a:schemeClr val="accent1"/>
+          </a:fillRef>
+          <a:effectRef idx="2">
+            <a:schemeClr val="accent1"/>
+          </a:effectRef>
+          <a:fontRef idx="minor">
+            <a:schemeClr val="lt1"/>
+          </a:fontRef>
+        </p:style>
+        <p:txBody>
+          <a:bodyPr rtlCol="0" anchor="ctr" wrap="square"/>
+          <a:lstStyle/>
           <a:p>
             <a:pPr algn="ctr">
-              <a:defRPr sz="1100">
-                <a:solidFill>
-                  <a:srgbClr val="D8E6F2"/>
-                </a:solidFill>
-              </a:defRPr>
-            </a:pPr>
-            <a:r>
-              <a:t>XML DAGs</a:t>
-            </a:r>
-          </a:p>
+              <a:defRPr sz="1300" b="1">
+                <a:solidFill>
+                  <a:srgbClr val="FFFFFF"/>
+                </a:solidFill>
+              </a:defRPr>
+            </a:pPr>
+            <a:r>
+              <a:t>Config/data only</a:t>
+            </a:r>
+          </a:p>
+        </p:txBody>
+      </p:sp>
+      <p:sp>
+        <p:nvSpPr>
+          <p:cNvPr id="9" name="TextBox 8"/>
+          <p:cNvSpPr txBox="1"/>
+          <p:nvPr/>
+        </p:nvSpPr>
+        <p:spPr>
+          <a:xfrm>
+            <a:off x="2884932" y="2670048"/>
+            <a:ext cx="182880" cy="164592"/>
+          </a:xfrm>
+          <a:prstGeom prst="rect">
+            <a:avLst/>
+          </a:prstGeom>
+          <a:noFill/>
+        </p:spPr>
+        <p:txBody>
+          <a:bodyPr wrap="none">
+            <a:spAutoFit/>
+          </a:bodyPr>
+          <a:lstStyle/>
           <a:p>
             <a:pPr algn="ctr">
-              <a:defRPr sz="1100">
-                <a:solidFill>
-                  <a:srgbClr val="D8E6F2"/>
-                </a:solidFill>
-              </a:defRPr>
-            </a:pPr>
-            <a:r>
-              <a:t>Flexible triggers</a:t>
-            </a:r>
-          </a:p>
+              <a:defRPr sz="1800" b="1">
+                <a:solidFill>
+                  <a:srgbClr val="4DB6E5"/>
+                </a:solidFill>
+              </a:defRPr>
+            </a:pPr>
+            <a:r>
+              <a:t>&gt;</a:t>
+            </a:r>
+          </a:p>
+        </p:txBody>
+      </p:sp>
+      <p:sp>
+        <p:nvSpPr>
+          <p:cNvPr id="10" name="Rounded Rectangle 9"/>
+          <p:cNvSpPr/>
+          <p:nvPr/>
+        </p:nvSpPr>
+        <p:spPr>
+          <a:xfrm>
+            <a:off x="3063239" y="2514600"/>
+            <a:ext cx="2286000" cy="457200"/>
+          </a:xfrm>
+          <a:prstGeom prst="roundRect">
+            <a:avLst/>
+          </a:prstGeom>
+          <a:solidFill>
+            <a:srgbClr val="295683"/>
+          </a:solidFill>
+          <a:ln w="12700">
+            <a:solidFill>
+              <a:srgbClr val="5D7B9D"/>
+            </a:solidFill>
+          </a:ln>
+        </p:spPr>
+        <p:style>
+          <a:lnRef idx="1">
+            <a:schemeClr val="accent1"/>
+          </a:lnRef>
+          <a:fillRef idx="3">
+            <a:schemeClr val="accent1"/>
+          </a:fillRef>
+          <a:effectRef idx="2">
+            <a:schemeClr val="accent1"/>
+          </a:effectRef>
+          <a:fontRef idx="minor">
+            <a:schemeClr val="lt1"/>
+          </a:fontRef>
+        </p:style>
+        <p:txBody>
+          <a:bodyPr rtlCol="0" anchor="ctr" wrap="square"/>
+          <a:lstStyle/>
           <a:p>
             <a:pPr algn="ctr">
-              <a:defRPr sz="1100">
-                <a:solidFill>
-                  <a:srgbClr val="D8E6F2"/>
-                </a:solidFill>
-              </a:defRPr>
-            </a:pPr>
-            <a:r>
-              <a:t>Clear scheduling</a:t>
-            </a:r>
-          </a:p>
-        </p:txBody>
-      </p:sp>
-      <p:sp>
-        <p:nvSpPr>
-          <p:cNvPr id="7" name="Rounded Rectangle 6"/>
+              <a:defRPr sz="1300" b="1">
+                <a:solidFill>
+                  <a:srgbClr val="FFFFFF"/>
+                </a:solidFill>
+              </a:defRPr>
+            </a:pPr>
+            <a:r>
+              <a:t>Volume sync</a:t>
+            </a:r>
+          </a:p>
+        </p:txBody>
+      </p:sp>
+      <p:sp>
+        <p:nvSpPr>
+          <p:cNvPr id="11" name="Rounded Rectangle 10"/>
           <p:cNvSpPr/>
           <p:nvPr/>
         </p:nvSpPr>
         <p:spPr>
           <a:xfrm>
-            <a:off x="3337560" y="1417320"/>
-            <a:ext cx="2423160" cy="1417320"/>
+            <a:off x="3383280" y="2514600"/>
+            <a:ext cx="2286000" cy="457200"/>
+          </a:xfrm>
+          <a:prstGeom prst="roundRect">
+            <a:avLst/>
+          </a:prstGeom>
+          <a:solidFill>
+            <a:srgbClr val="295683"/>
+          </a:solidFill>
+          <a:ln w="12700">
+            <a:solidFill>
+              <a:srgbClr val="5D7B9D"/>
+            </a:solidFill>
+          </a:ln>
+        </p:spPr>
+        <p:style>
+          <a:lnRef idx="1">
+            <a:schemeClr val="accent1"/>
+          </a:lnRef>
+          <a:fillRef idx="3">
+            <a:schemeClr val="accent1"/>
+          </a:fillRef>
+          <a:effectRef idx="2">
+            <a:schemeClr val="accent1"/>
+          </a:effectRef>
+          <a:fontRef idx="minor">
+            <a:schemeClr val="lt1"/>
+          </a:fontRef>
+        </p:style>
+        <p:txBody>
+          <a:bodyPr rtlCol="0" anchor="ctr" wrap="square"/>
+          <a:lstStyle/>
+          <a:p>
+            <a:pPr algn="ctr">
+              <a:defRPr sz="1300" b="1">
+                <a:solidFill>
+                  <a:srgbClr val="FFFFFF"/>
+                </a:solidFill>
+              </a:defRPr>
+            </a:pPr>
+            <a:r>
+              <a:t>Code/Dockerfile</a:t>
+            </a:r>
+          </a:p>
+        </p:txBody>
+      </p:sp>
+      <p:sp>
+        <p:nvSpPr>
+          <p:cNvPr id="12" name="TextBox 11"/>
+          <p:cNvSpPr txBox="1"/>
+          <p:nvPr/>
+        </p:nvSpPr>
+        <p:spPr>
+          <a:xfrm>
+            <a:off x="5765292" y="2670048"/>
+            <a:ext cx="182880" cy="164592"/>
+          </a:xfrm>
+          <a:prstGeom prst="rect">
+            <a:avLst/>
+          </a:prstGeom>
+          <a:noFill/>
+        </p:spPr>
+        <p:txBody>
+          <a:bodyPr wrap="none">
+            <a:spAutoFit/>
+          </a:bodyPr>
+          <a:lstStyle/>
+          <a:p>
+            <a:pPr algn="ctr">
+              <a:defRPr sz="1800" b="1">
+                <a:solidFill>
+                  <a:srgbClr val="4DB6E5"/>
+                </a:solidFill>
+              </a:defRPr>
+            </a:pPr>
+            <a:r>
+              <a:t>&gt;</a:t>
+            </a:r>
+          </a:p>
+        </p:txBody>
+      </p:sp>
+      <p:sp>
+        <p:nvSpPr>
+          <p:cNvPr id="13" name="Rounded Rectangle 12"/>
+          <p:cNvSpPr/>
+          <p:nvPr/>
+        </p:nvSpPr>
+        <p:spPr>
+          <a:xfrm>
+            <a:off x="5943600" y="2514600"/>
+            <a:ext cx="2286000" cy="457200"/>
+          </a:xfrm>
+          <a:prstGeom prst="roundRect">
+            <a:avLst/>
+          </a:prstGeom>
+          <a:solidFill>
+            <a:srgbClr val="295683"/>
+          </a:solidFill>
+          <a:ln w="12700">
+            <a:solidFill>
+              <a:srgbClr val="5D7B9D"/>
+            </a:solidFill>
+          </a:ln>
+        </p:spPr>
+        <p:style>
+          <a:lnRef idx="1">
+            <a:schemeClr val="accent1"/>
+          </a:lnRef>
+          <a:fillRef idx="3">
+            <a:schemeClr val="accent1"/>
+          </a:fillRef>
+          <a:effectRef idx="2">
+            <a:schemeClr val="accent1"/>
+          </a:effectRef>
+          <a:fontRef idx="minor">
+            <a:schemeClr val="lt1"/>
+          </a:fontRef>
+        </p:style>
+        <p:txBody>
+          <a:bodyPr rtlCol="0" anchor="ctr" wrap="square"/>
+          <a:lstStyle/>
+          <a:p>
+            <a:pPr algn="ctr">
+              <a:defRPr sz="1300" b="1">
+                <a:solidFill>
+                  <a:srgbClr val="FFFFFF"/>
+                </a:solidFill>
+              </a:defRPr>
+            </a:pPr>
+            <a:r>
+              <a:t>Build + up -d</a:t>
+            </a:r>
+          </a:p>
+        </p:txBody>
+      </p:sp>
+      <p:sp>
+        <p:nvSpPr>
+          <p:cNvPr id="14" name="Rounded Rectangle 13"/>
+          <p:cNvSpPr/>
+          <p:nvPr/>
+        </p:nvSpPr>
+        <p:spPr>
+          <a:xfrm>
+            <a:off x="502920" y="3200400"/>
+            <a:ext cx="8183879" cy="685800"/>
           </a:xfrm>
           <a:prstGeom prst="roundRect">
             <a:avLst/>
@@ -4354,10 +4880,10 @@
           </a:fontRef>
         </p:style>
         <p:txBody>
-          <a:bodyPr rtlCol="0" anchor="ctr" wrap="square"/>
-          <a:lstStyle/>
-          <a:p>
-            <a:pPr algn="ctr">
+          <a:bodyPr rtlCol="0" anchor="t" wrap="square"/>
+          <a:lstStyle/>
+          <a:p>
+            <a:pPr algn="l">
               <a:spcAft>
                 <a:spcPts val="800"/>
               </a:spcAft>
@@ -4368,57 +4894,244 @@
               </a:defRPr>
             </a:pPr>
             <a:r>
-              <a:t>Vascular</a:t>
-            </a:r>
-          </a:p>
-          <a:p>
-            <a:pPr algn="ctr">
-              <a:defRPr sz="1100">
+              <a:t>Quick checklist</a:t>
+            </a:r>
+          </a:p>
+          <a:p>
+            <a:pPr algn="l">
+              <a:defRPr sz="900">
                 <a:solidFill>
                   <a:srgbClr val="D8E6F2"/>
                 </a:solidFill>
               </a:defRPr>
             </a:pPr>
             <a:r>
-              <a:t>FastAPI + Celery</a:t>
-            </a:r>
-          </a:p>
-          <a:p>
-            <a:pPr algn="ctr">
-              <a:defRPr sz="1100">
-                <a:solidFill>
-                  <a:srgbClr val="D8E6F2"/>
-                </a:solidFill>
-              </a:defRPr>
-            </a:pPr>
-            <a:r>
-              <a:t>FC 6-step flow</a:t>
-            </a:r>
-          </a:p>
-          <a:p>
-            <a:pPr algn="ctr">
-              <a:defRPr sz="1100">
-                <a:solidFill>
-                  <a:srgbClr val="D8E6F2"/>
-                </a:solidFill>
-              </a:defRPr>
-            </a:pPr>
-            <a:r>
-              <a:t>Redis context</a:t>
-            </a:r>
-          </a:p>
-        </p:txBody>
-      </p:sp>
-      <p:sp>
-        <p:nvSpPr>
-          <p:cNvPr id="8" name="Rounded Rectangle 7"/>
+              <a:t>DAGs: dag_definitions/*.xml. Env: VASCULAR_CELERY_BROKER_URL for Celery/FC. Network: airflow_shared_net for Option A.</a:t>
+            </a:r>
+          </a:p>
+        </p:txBody>
+      </p:sp>
+      <p:sp>
+        <p:nvSpPr>
+          <p:cNvPr id="15" name="TextBox 14"/>
+          <p:cNvSpPr txBox="1"/>
+          <p:nvPr/>
+        </p:nvSpPr>
+        <p:spPr>
+          <a:xfrm>
+            <a:off x="502920" y="6400800"/>
+            <a:ext cx="7772400" cy="182880"/>
+          </a:xfrm>
+          <a:prstGeom prst="rect">
+            <a:avLst/>
+          </a:prstGeom>
+          <a:noFill/>
+        </p:spPr>
+        <p:txBody>
+          <a:bodyPr wrap="none">
+            <a:spAutoFit/>
+          </a:bodyPr>
+          <a:lstStyle/>
+          <a:p>
+            <a:pPr>
+              <a:defRPr sz="900">
+                <a:solidFill>
+                  <a:srgbClr val="B3C3D6"/>
+                </a:solidFill>
+              </a:defRPr>
+            </a:pPr>
+            <a:r>
+              <a:t>References: README, OPERATION_GUIDE.md.</a:t>
+            </a:r>
+          </a:p>
+        </p:txBody>
+      </p:sp>
+    </p:spTree>
+  </p:cSld>
+  <p:clrMapOvr>
+    <a:masterClrMapping/>
+  </p:clrMapOvr>
+</p:sld>
+</file>
+
+<file path=ppt/slides/slide12.xml><?xml version="1.0" encoding="utf-8"?>
+<p:sld xmlns:a="http://schemas.openxmlformats.org/drawingml/2006/main" xmlns:p="http://schemas.openxmlformats.org/presentationml/2006/main" xmlns:r="http://schemas.openxmlformats.org/officeDocument/2006/relationships">
+  <p:cSld>
+    <p:bg>
+      <p:bgPr>
+        <a:solidFill>
+          <a:srgbClr val="14253D"/>
+        </a:solidFill>
+        <a:effectLst/>
+      </p:bgPr>
+    </p:bg>
+    <p:spTree>
+      <p:nvGrpSpPr>
+        <p:cNvPr id="1" name=""/>
+        <p:cNvGrpSpPr/>
+        <p:nvPr/>
+      </p:nvGrpSpPr>
+      <p:grpSpPr/>
+      <p:sp>
+        <p:nvSpPr>
+          <p:cNvPr id="2" name="Rectangle 1"/>
           <p:cNvSpPr/>
           <p:nvPr/>
         </p:nvSpPr>
         <p:spPr>
           <a:xfrm>
-            <a:off x="6035040" y="1417320"/>
-            <a:ext cx="2423160" cy="1417320"/>
+            <a:off x="0" y="0"/>
+            <a:ext cx="9144000" cy="868680"/>
+          </a:xfrm>
+          <a:prstGeom prst="rect">
+            <a:avLst/>
+          </a:prstGeom>
+          <a:solidFill>
+            <a:srgbClr val="1F3B5B"/>
+          </a:solidFill>
+          <a:ln>
+            <a:solidFill>
+              <a:srgbClr val="1F3B5B"/>
+            </a:solidFill>
+          </a:ln>
+        </p:spPr>
+        <p:style>
+          <a:lnRef idx="1">
+            <a:schemeClr val="accent1"/>
+          </a:lnRef>
+          <a:fillRef idx="3">
+            <a:schemeClr val="accent1"/>
+          </a:fillRef>
+          <a:effectRef idx="2">
+            <a:schemeClr val="accent1"/>
+          </a:effectRef>
+          <a:fontRef idx="minor">
+            <a:schemeClr val="lt1"/>
+          </a:fontRef>
+        </p:style>
+        <p:txBody>
+          <a:bodyPr rtlCol="0" anchor="ctr"/>
+          <a:lstStyle/>
+          <a:p>
+            <a:pPr algn="ctr"/>
+          </a:p>
+        </p:txBody>
+      </p:sp>
+      <p:sp>
+        <p:nvSpPr>
+          <p:cNvPr id="3" name="TextBox 2"/>
+          <p:cNvSpPr txBox="1"/>
+          <p:nvPr/>
+        </p:nvSpPr>
+        <p:spPr>
+          <a:xfrm>
+            <a:off x="502920" y="164592"/>
+            <a:ext cx="1828800" cy="182880"/>
+          </a:xfrm>
+          <a:prstGeom prst="rect">
+            <a:avLst/>
+          </a:prstGeom>
+          <a:noFill/>
+        </p:spPr>
+        <p:txBody>
+          <a:bodyPr wrap="none">
+            <a:spAutoFit/>
+          </a:bodyPr>
+          <a:lstStyle/>
+          <a:p>
+            <a:pPr>
+              <a:defRPr sz="900" b="1">
+                <a:solidFill>
+                  <a:srgbClr val="4DB6E5"/>
+                </a:solidFill>
+              </a:defRPr>
+            </a:pPr>
+            <a:r>
+              <a:t>ROADMAP</a:t>
+            </a:r>
+          </a:p>
+        </p:txBody>
+      </p:sp>
+      <p:sp>
+        <p:nvSpPr>
+          <p:cNvPr id="4" name="TextBox 3"/>
+          <p:cNvSpPr txBox="1"/>
+          <p:nvPr/>
+        </p:nvSpPr>
+        <p:spPr>
+          <a:xfrm>
+            <a:off x="502920" y="310896"/>
+            <a:ext cx="7223760" cy="347472"/>
+          </a:xfrm>
+          <a:prstGeom prst="rect">
+            <a:avLst/>
+          </a:prstGeom>
+          <a:noFill/>
+        </p:spPr>
+        <p:txBody>
+          <a:bodyPr wrap="none">
+            <a:spAutoFit/>
+          </a:bodyPr>
+          <a:lstStyle/>
+          <a:p>
+            <a:pPr>
+              <a:defRPr sz="2400" b="1">
+                <a:solidFill>
+                  <a:srgbClr val="FFFFFF"/>
+                </a:solidFill>
+              </a:defRPr>
+            </a:pPr>
+            <a:r>
+              <a:t>Future development (TBC)</a:t>
+            </a:r>
+          </a:p>
+        </p:txBody>
+      </p:sp>
+      <p:sp>
+        <p:nvSpPr>
+          <p:cNvPr id="5" name="TextBox 4"/>
+          <p:cNvSpPr txBox="1"/>
+          <p:nvPr/>
+        </p:nvSpPr>
+        <p:spPr>
+          <a:xfrm>
+            <a:off x="8229600" y="201168"/>
+            <a:ext cx="411480" cy="228600"/>
+          </a:xfrm>
+          <a:prstGeom prst="rect">
+            <a:avLst/>
+          </a:prstGeom>
+          <a:noFill/>
+        </p:spPr>
+        <p:txBody>
+          <a:bodyPr wrap="none">
+            <a:spAutoFit/>
+          </a:bodyPr>
+          <a:lstStyle/>
+          <a:p>
+            <a:pPr algn="r">
+              <a:defRPr sz="1100" b="1">
+                <a:solidFill>
+                  <a:srgbClr val="B3C3D6"/>
+                </a:solidFill>
+              </a:defRPr>
+            </a:pPr>
+            <a:r>
+              <a:t>11</a:t>
+            </a:r>
+          </a:p>
+        </p:txBody>
+      </p:sp>
+      <p:sp>
+        <p:nvSpPr>
+          <p:cNvPr id="6" name="Rounded Rectangle 5"/>
+          <p:cNvSpPr/>
+          <p:nvPr/>
+        </p:nvSpPr>
+        <p:spPr>
+          <a:xfrm>
+            <a:off x="640080" y="1325880"/>
+            <a:ext cx="2377440" cy="1325880"/>
           </a:xfrm>
           <a:prstGeom prst="roundRect">
             <a:avLst/>
@@ -4447,6 +5160,565 @@
           </a:fontRef>
         </p:style>
         <p:txBody>
+          <a:bodyPr rtlCol="0" anchor="t" wrap="square"/>
+          <a:lstStyle/>
+          <a:p>
+            <a:pPr algn="l">
+              <a:spcAft>
+                <a:spcPts val="800"/>
+              </a:spcAft>
+              <a:defRPr sz="1300" b="1">
+                <a:solidFill>
+                  <a:srgbClr val="FFFFFF"/>
+                </a:solidFill>
+              </a:defRPr>
+            </a:pPr>
+            <a:r>
+              <a:t>Prometheus</a:t>
+            </a:r>
+          </a:p>
+          <a:p>
+            <a:pPr algn="l">
+              <a:defRPr sz="1100">
+                <a:solidFill>
+                  <a:srgbClr val="D8E6F2"/>
+                </a:solidFill>
+              </a:defRPr>
+            </a:pPr>
+            <a:r>
+              <a:t>Metrics</a:t>
+            </a:r>
+          </a:p>
+          <a:p>
+            <a:pPr algn="l">
+              <a:defRPr sz="1100">
+                <a:solidFill>
+                  <a:srgbClr val="D8E6F2"/>
+                </a:solidFill>
+              </a:defRPr>
+            </a:pPr>
+            <a:r>
+              <a:t>Port 9090</a:t>
+            </a:r>
+          </a:p>
+          <a:p>
+            <a:pPr algn="l">
+              <a:defRPr sz="1100">
+                <a:solidFill>
+                  <a:srgbClr val="D8E6F2"/>
+                </a:solidFill>
+              </a:defRPr>
+            </a:pPr>
+            <a:r>
+              <a:t>Time-series storage</a:t>
+            </a:r>
+          </a:p>
+        </p:txBody>
+      </p:sp>
+      <p:sp>
+        <p:nvSpPr>
+          <p:cNvPr id="7" name="Rounded Rectangle 6"/>
+          <p:cNvSpPr/>
+          <p:nvPr/>
+        </p:nvSpPr>
+        <p:spPr>
+          <a:xfrm>
+            <a:off x="3383280" y="1325880"/>
+            <a:ext cx="2377440" cy="1325880"/>
+          </a:xfrm>
+          <a:prstGeom prst="roundRect">
+            <a:avLst/>
+          </a:prstGeom>
+          <a:solidFill>
+            <a:srgbClr val="22476B"/>
+          </a:solidFill>
+          <a:ln w="12700">
+            <a:solidFill>
+              <a:srgbClr val="5D7B9D"/>
+            </a:solidFill>
+          </a:ln>
+        </p:spPr>
+        <p:style>
+          <a:lnRef idx="1">
+            <a:schemeClr val="accent1"/>
+          </a:lnRef>
+          <a:fillRef idx="3">
+            <a:schemeClr val="accent1"/>
+          </a:fillRef>
+          <a:effectRef idx="2">
+            <a:schemeClr val="accent1"/>
+          </a:effectRef>
+          <a:fontRef idx="minor">
+            <a:schemeClr val="lt1"/>
+          </a:fontRef>
+        </p:style>
+        <p:txBody>
+          <a:bodyPr rtlCol="0" anchor="t" wrap="square"/>
+          <a:lstStyle/>
+          <a:p>
+            <a:pPr algn="l">
+              <a:spcAft>
+                <a:spcPts val="800"/>
+              </a:spcAft>
+              <a:defRPr sz="1300" b="1">
+                <a:solidFill>
+                  <a:srgbClr val="FFFFFF"/>
+                </a:solidFill>
+              </a:defRPr>
+            </a:pPr>
+            <a:r>
+              <a:t>Loki</a:t>
+            </a:r>
+          </a:p>
+          <a:p>
+            <a:pPr algn="l">
+              <a:defRPr sz="1100">
+                <a:solidFill>
+                  <a:srgbClr val="D8E6F2"/>
+                </a:solidFill>
+              </a:defRPr>
+            </a:pPr>
+            <a:r>
+              <a:t>Logs</a:t>
+            </a:r>
+          </a:p>
+          <a:p>
+            <a:pPr algn="l">
+              <a:defRPr sz="1100">
+                <a:solidFill>
+                  <a:srgbClr val="D8E6F2"/>
+                </a:solidFill>
+              </a:defRPr>
+            </a:pPr>
+            <a:r>
+              <a:t>Port 3100</a:t>
+            </a:r>
+          </a:p>
+          <a:p>
+            <a:pPr algn="l">
+              <a:defRPr sz="1100">
+                <a:solidFill>
+                  <a:srgbClr val="D8E6F2"/>
+                </a:solidFill>
+              </a:defRPr>
+            </a:pPr>
+            <a:r>
+              <a:t>Query by stream</a:t>
+            </a:r>
+          </a:p>
+        </p:txBody>
+      </p:sp>
+      <p:sp>
+        <p:nvSpPr>
+          <p:cNvPr id="8" name="Rounded Rectangle 7"/>
+          <p:cNvSpPr/>
+          <p:nvPr/>
+        </p:nvSpPr>
+        <p:spPr>
+          <a:xfrm>
+            <a:off x="6126480" y="1325880"/>
+            <a:ext cx="2377440" cy="1325880"/>
+          </a:xfrm>
+          <a:prstGeom prst="roundRect">
+            <a:avLst/>
+          </a:prstGeom>
+          <a:solidFill>
+            <a:srgbClr val="295683"/>
+          </a:solidFill>
+          <a:ln w="12700">
+            <a:solidFill>
+              <a:srgbClr val="5D7B9D"/>
+            </a:solidFill>
+          </a:ln>
+        </p:spPr>
+        <p:style>
+          <a:lnRef idx="1">
+            <a:schemeClr val="accent1"/>
+          </a:lnRef>
+          <a:fillRef idx="3">
+            <a:schemeClr val="accent1"/>
+          </a:fillRef>
+          <a:effectRef idx="2">
+            <a:schemeClr val="accent1"/>
+          </a:effectRef>
+          <a:fontRef idx="minor">
+            <a:schemeClr val="lt1"/>
+          </a:fontRef>
+        </p:style>
+        <p:txBody>
+          <a:bodyPr rtlCol="0" anchor="t" wrap="square"/>
+          <a:lstStyle/>
+          <a:p>
+            <a:pPr algn="l">
+              <a:spcAft>
+                <a:spcPts val="800"/>
+              </a:spcAft>
+              <a:defRPr sz="1300" b="1">
+                <a:solidFill>
+                  <a:srgbClr val="FFFFFF"/>
+                </a:solidFill>
+              </a:defRPr>
+            </a:pPr>
+            <a:r>
+              <a:t>Grafana</a:t>
+            </a:r>
+          </a:p>
+          <a:p>
+            <a:pPr algn="l">
+              <a:defRPr sz="1100">
+                <a:solidFill>
+                  <a:srgbClr val="D8E6F2"/>
+                </a:solidFill>
+              </a:defRPr>
+            </a:pPr>
+            <a:r>
+              <a:t>Dashboards</a:t>
+            </a:r>
+          </a:p>
+          <a:p>
+            <a:pPr algn="l">
+              <a:defRPr sz="1100">
+                <a:solidFill>
+                  <a:srgbClr val="D8E6F2"/>
+                </a:solidFill>
+              </a:defRPr>
+            </a:pPr>
+            <a:r>
+              <a:t>Port 3000</a:t>
+            </a:r>
+          </a:p>
+          <a:p>
+            <a:pPr algn="l">
+              <a:defRPr sz="1100">
+                <a:solidFill>
+                  <a:srgbClr val="D8E6F2"/>
+                </a:solidFill>
+              </a:defRPr>
+            </a:pPr>
+            <a:r>
+              <a:t>Single UI</a:t>
+            </a:r>
+          </a:p>
+        </p:txBody>
+      </p:sp>
+      <p:sp>
+        <p:nvSpPr>
+          <p:cNvPr id="9" name="Rounded Rectangle 8"/>
+          <p:cNvSpPr/>
+          <p:nvPr/>
+        </p:nvSpPr>
+        <p:spPr>
+          <a:xfrm>
+            <a:off x="1371600" y="3154680"/>
+            <a:ext cx="6400800" cy="914400"/>
+          </a:xfrm>
+          <a:prstGeom prst="roundRect">
+            <a:avLst/>
+          </a:prstGeom>
+          <a:solidFill>
+            <a:srgbClr val="22476B"/>
+          </a:solidFill>
+          <a:ln w="12700">
+            <a:solidFill>
+              <a:srgbClr val="5D7B9D"/>
+            </a:solidFill>
+          </a:ln>
+        </p:spPr>
+        <p:style>
+          <a:lnRef idx="1">
+            <a:schemeClr val="accent1"/>
+          </a:lnRef>
+          <a:fillRef idx="3">
+            <a:schemeClr val="accent1"/>
+          </a:fillRef>
+          <a:effectRef idx="2">
+            <a:schemeClr val="accent1"/>
+          </a:effectRef>
+          <a:fontRef idx="minor">
+            <a:schemeClr val="lt1"/>
+          </a:fontRef>
+        </p:style>
+        <p:txBody>
+          <a:bodyPr rtlCol="0" anchor="t" wrap="square"/>
+          <a:lstStyle/>
+          <a:p>
+            <a:pPr algn="l">
+              <a:spcAft>
+                <a:spcPts val="800"/>
+              </a:spcAft>
+              <a:defRPr sz="1300" b="1">
+                <a:solidFill>
+                  <a:srgbClr val="FFFFFF"/>
+                </a:solidFill>
+              </a:defRPr>
+            </a:pPr>
+            <a:r>
+              <a:t>Planned relationship</a:t>
+            </a:r>
+          </a:p>
+          <a:p>
+            <a:pPr algn="l">
+              <a:defRPr sz="1100">
+                <a:solidFill>
+                  <a:srgbClr val="D8E6F2"/>
+                </a:solidFill>
+              </a:defRPr>
+            </a:pPr>
+            <a:r>
+              <a:t>Prometheus -&gt; Grafana  |  Loki -&gt; Grafana</a:t>
+            </a:r>
+          </a:p>
+        </p:txBody>
+      </p:sp>
+      <p:sp>
+        <p:nvSpPr>
+          <p:cNvPr id="10" name="TextBox 9"/>
+          <p:cNvSpPr txBox="1"/>
+          <p:nvPr/>
+        </p:nvSpPr>
+        <p:spPr>
+          <a:xfrm>
+            <a:off x="502920" y="6400800"/>
+            <a:ext cx="7772400" cy="182880"/>
+          </a:xfrm>
+          <a:prstGeom prst="rect">
+            <a:avLst/>
+          </a:prstGeom>
+          <a:noFill/>
+        </p:spPr>
+        <p:txBody>
+          <a:bodyPr wrap="none">
+            <a:spAutoFit/>
+          </a:bodyPr>
+          <a:lstStyle/>
+          <a:p>
+            <a:pPr>
+              <a:defRPr sz="900">
+                <a:solidFill>
+                  <a:srgbClr val="B3C3D6"/>
+                </a:solidFill>
+              </a:defRPr>
+            </a:pPr>
+            <a:r>
+              <a:t>Airflow and Vascular overview</a:t>
+            </a:r>
+          </a:p>
+        </p:txBody>
+      </p:sp>
+    </p:spTree>
+  </p:cSld>
+  <p:clrMapOvr>
+    <a:masterClrMapping/>
+  </p:clrMapOvr>
+</p:sld>
+</file>
+
+<file path=ppt/slides/slide13.xml><?xml version="1.0" encoding="utf-8"?>
+<p:sld xmlns:a="http://schemas.openxmlformats.org/drawingml/2006/main" xmlns:p="http://schemas.openxmlformats.org/presentationml/2006/main" xmlns:r="http://schemas.openxmlformats.org/officeDocument/2006/relationships">
+  <p:cSld>
+    <p:bg>
+      <p:bgPr>
+        <a:solidFill>
+          <a:srgbClr val="14253D"/>
+        </a:solidFill>
+        <a:effectLst/>
+      </p:bgPr>
+    </p:bg>
+    <p:spTree>
+      <p:nvGrpSpPr>
+        <p:cNvPr id="1" name=""/>
+        <p:cNvGrpSpPr/>
+        <p:nvPr/>
+      </p:nvGrpSpPr>
+      <p:grpSpPr/>
+      <p:sp>
+        <p:nvSpPr>
+          <p:cNvPr id="2" name="Rectangle 1"/>
+          <p:cNvSpPr/>
+          <p:nvPr/>
+        </p:nvSpPr>
+        <p:spPr>
+          <a:xfrm>
+            <a:off x="0" y="0"/>
+            <a:ext cx="9144000" cy="868680"/>
+          </a:xfrm>
+          <a:prstGeom prst="rect">
+            <a:avLst/>
+          </a:prstGeom>
+          <a:solidFill>
+            <a:srgbClr val="1F3B5B"/>
+          </a:solidFill>
+          <a:ln>
+            <a:solidFill>
+              <a:srgbClr val="1F3B5B"/>
+            </a:solidFill>
+          </a:ln>
+        </p:spPr>
+        <p:style>
+          <a:lnRef idx="1">
+            <a:schemeClr val="accent1"/>
+          </a:lnRef>
+          <a:fillRef idx="3">
+            <a:schemeClr val="accent1"/>
+          </a:fillRef>
+          <a:effectRef idx="2">
+            <a:schemeClr val="accent1"/>
+          </a:effectRef>
+          <a:fontRef idx="minor">
+            <a:schemeClr val="lt1"/>
+          </a:fontRef>
+        </p:style>
+        <p:txBody>
+          <a:bodyPr rtlCol="0" anchor="ctr"/>
+          <a:lstStyle/>
+          <a:p>
+            <a:pPr algn="ctr"/>
+          </a:p>
+        </p:txBody>
+      </p:sp>
+      <p:sp>
+        <p:nvSpPr>
+          <p:cNvPr id="3" name="TextBox 2"/>
+          <p:cNvSpPr txBox="1"/>
+          <p:nvPr/>
+        </p:nvSpPr>
+        <p:spPr>
+          <a:xfrm>
+            <a:off x="502920" y="164592"/>
+            <a:ext cx="1828800" cy="182880"/>
+          </a:xfrm>
+          <a:prstGeom prst="rect">
+            <a:avLst/>
+          </a:prstGeom>
+          <a:noFill/>
+        </p:spPr>
+        <p:txBody>
+          <a:bodyPr wrap="none">
+            <a:spAutoFit/>
+          </a:bodyPr>
+          <a:lstStyle/>
+          <a:p>
+            <a:pPr>
+              <a:defRPr sz="900" b="1">
+                <a:solidFill>
+                  <a:srgbClr val="4DB6E5"/>
+                </a:solidFill>
+              </a:defRPr>
+            </a:pPr>
+            <a:r>
+              <a:t>CLOSE</a:t>
+            </a:r>
+          </a:p>
+        </p:txBody>
+      </p:sp>
+      <p:sp>
+        <p:nvSpPr>
+          <p:cNvPr id="4" name="TextBox 3"/>
+          <p:cNvSpPr txBox="1"/>
+          <p:nvPr/>
+        </p:nvSpPr>
+        <p:spPr>
+          <a:xfrm>
+            <a:off x="502920" y="310896"/>
+            <a:ext cx="7223760" cy="347472"/>
+          </a:xfrm>
+          <a:prstGeom prst="rect">
+            <a:avLst/>
+          </a:prstGeom>
+          <a:noFill/>
+        </p:spPr>
+        <p:txBody>
+          <a:bodyPr wrap="none">
+            <a:spAutoFit/>
+          </a:bodyPr>
+          <a:lstStyle/>
+          <a:p>
+            <a:pPr>
+              <a:defRPr sz="2400" b="1">
+                <a:solidFill>
+                  <a:srgbClr val="FFFFFF"/>
+                </a:solidFill>
+              </a:defRPr>
+            </a:pPr>
+            <a:r>
+              <a:t>Summary</a:t>
+            </a:r>
+          </a:p>
+        </p:txBody>
+      </p:sp>
+      <p:sp>
+        <p:nvSpPr>
+          <p:cNvPr id="5" name="TextBox 4"/>
+          <p:cNvSpPr txBox="1"/>
+          <p:nvPr/>
+        </p:nvSpPr>
+        <p:spPr>
+          <a:xfrm>
+            <a:off x="8229600" y="201168"/>
+            <a:ext cx="411480" cy="228600"/>
+          </a:xfrm>
+          <a:prstGeom prst="rect">
+            <a:avLst/>
+          </a:prstGeom>
+          <a:noFill/>
+        </p:spPr>
+        <p:txBody>
+          <a:bodyPr wrap="none">
+            <a:spAutoFit/>
+          </a:bodyPr>
+          <a:lstStyle/>
+          <a:p>
+            <a:pPr algn="r">
+              <a:defRPr sz="1100" b="1">
+                <a:solidFill>
+                  <a:srgbClr val="B3C3D6"/>
+                </a:solidFill>
+              </a:defRPr>
+            </a:pPr>
+            <a:r>
+              <a:t>12</a:t>
+            </a:r>
+          </a:p>
+        </p:txBody>
+      </p:sp>
+      <p:sp>
+        <p:nvSpPr>
+          <p:cNvPr id="6" name="Rounded Rectangle 5"/>
+          <p:cNvSpPr/>
+          <p:nvPr/>
+        </p:nvSpPr>
+        <p:spPr>
+          <a:xfrm>
+            <a:off x="640080" y="1417320"/>
+            <a:ext cx="2423160" cy="1417320"/>
+          </a:xfrm>
+          <a:prstGeom prst="roundRect">
+            <a:avLst/>
+          </a:prstGeom>
+          <a:solidFill>
+            <a:srgbClr val="295683"/>
+          </a:solidFill>
+          <a:ln w="12700">
+            <a:solidFill>
+              <a:srgbClr val="5D7B9D"/>
+            </a:solidFill>
+          </a:ln>
+        </p:spPr>
+        <p:style>
+          <a:lnRef idx="1">
+            <a:schemeClr val="accent1"/>
+          </a:lnRef>
+          <a:fillRef idx="3">
+            <a:schemeClr val="accent1"/>
+          </a:fillRef>
+          <a:effectRef idx="2">
+            <a:schemeClr val="accent1"/>
+          </a:effectRef>
+          <a:fontRef idx="minor">
+            <a:schemeClr val="lt1"/>
+          </a:fontRef>
+        </p:style>
+        <p:txBody>
           <a:bodyPr rtlCol="0" anchor="ctr" wrap="square"/>
           <a:lstStyle/>
           <a:p>
@@ -4461,6 +5733,192 @@
               </a:defRPr>
             </a:pPr>
             <a:r>
+              <a:t>Airflow</a:t>
+            </a:r>
+          </a:p>
+          <a:p>
+            <a:pPr algn="ctr">
+              <a:defRPr sz="1100">
+                <a:solidFill>
+                  <a:srgbClr val="D8E6F2"/>
+                </a:solidFill>
+              </a:defRPr>
+            </a:pPr>
+            <a:r>
+              <a:t>XML DAGs</a:t>
+            </a:r>
+          </a:p>
+          <a:p>
+            <a:pPr algn="ctr">
+              <a:defRPr sz="1100">
+                <a:solidFill>
+                  <a:srgbClr val="D8E6F2"/>
+                </a:solidFill>
+              </a:defRPr>
+            </a:pPr>
+            <a:r>
+              <a:t>Flexible triggers</a:t>
+            </a:r>
+          </a:p>
+          <a:p>
+            <a:pPr algn="ctr">
+              <a:defRPr sz="1100">
+                <a:solidFill>
+                  <a:srgbClr val="D8E6F2"/>
+                </a:solidFill>
+              </a:defRPr>
+            </a:pPr>
+            <a:r>
+              <a:t>Clear scheduling</a:t>
+            </a:r>
+          </a:p>
+        </p:txBody>
+      </p:sp>
+      <p:sp>
+        <p:nvSpPr>
+          <p:cNvPr id="7" name="Rounded Rectangle 6"/>
+          <p:cNvSpPr/>
+          <p:nvPr/>
+        </p:nvSpPr>
+        <p:spPr>
+          <a:xfrm>
+            <a:off x="3337560" y="1417320"/>
+            <a:ext cx="2423160" cy="1417320"/>
+          </a:xfrm>
+          <a:prstGeom prst="roundRect">
+            <a:avLst/>
+          </a:prstGeom>
+          <a:solidFill>
+            <a:srgbClr val="22476B"/>
+          </a:solidFill>
+          <a:ln w="12700">
+            <a:solidFill>
+              <a:srgbClr val="5D7B9D"/>
+            </a:solidFill>
+          </a:ln>
+        </p:spPr>
+        <p:style>
+          <a:lnRef idx="1">
+            <a:schemeClr val="accent1"/>
+          </a:lnRef>
+          <a:fillRef idx="3">
+            <a:schemeClr val="accent1"/>
+          </a:fillRef>
+          <a:effectRef idx="2">
+            <a:schemeClr val="accent1"/>
+          </a:effectRef>
+          <a:fontRef idx="minor">
+            <a:schemeClr val="lt1"/>
+          </a:fontRef>
+        </p:style>
+        <p:txBody>
+          <a:bodyPr rtlCol="0" anchor="ctr" wrap="square"/>
+          <a:lstStyle/>
+          <a:p>
+            <a:pPr algn="ctr">
+              <a:spcAft>
+                <a:spcPts val="800"/>
+              </a:spcAft>
+              <a:defRPr sz="1300" b="1">
+                <a:solidFill>
+                  <a:srgbClr val="FFFFFF"/>
+                </a:solidFill>
+              </a:defRPr>
+            </a:pPr>
+            <a:r>
+              <a:t>Vascular</a:t>
+            </a:r>
+          </a:p>
+          <a:p>
+            <a:pPr algn="ctr">
+              <a:defRPr sz="1100">
+                <a:solidFill>
+                  <a:srgbClr val="D8E6F2"/>
+                </a:solidFill>
+              </a:defRPr>
+            </a:pPr>
+            <a:r>
+              <a:t>FastAPI + Celery</a:t>
+            </a:r>
+          </a:p>
+          <a:p>
+            <a:pPr algn="ctr">
+              <a:defRPr sz="1100">
+                <a:solidFill>
+                  <a:srgbClr val="D8E6F2"/>
+                </a:solidFill>
+              </a:defRPr>
+            </a:pPr>
+            <a:r>
+              <a:t>FC 6-step flow</a:t>
+            </a:r>
+          </a:p>
+          <a:p>
+            <a:pPr algn="ctr">
+              <a:defRPr sz="1100">
+                <a:solidFill>
+                  <a:srgbClr val="D8E6F2"/>
+                </a:solidFill>
+              </a:defRPr>
+            </a:pPr>
+            <a:r>
+              <a:t>Redis context</a:t>
+            </a:r>
+          </a:p>
+        </p:txBody>
+      </p:sp>
+      <p:sp>
+        <p:nvSpPr>
+          <p:cNvPr id="8" name="Rounded Rectangle 7"/>
+          <p:cNvSpPr/>
+          <p:nvPr/>
+        </p:nvSpPr>
+        <p:spPr>
+          <a:xfrm>
+            <a:off x="6035040" y="1417320"/>
+            <a:ext cx="2423160" cy="1417320"/>
+          </a:xfrm>
+          <a:prstGeom prst="roundRect">
+            <a:avLst/>
+          </a:prstGeom>
+          <a:solidFill>
+            <a:srgbClr val="295683"/>
+          </a:solidFill>
+          <a:ln w="12700">
+            <a:solidFill>
+              <a:srgbClr val="5D7B9D"/>
+            </a:solidFill>
+          </a:ln>
+        </p:spPr>
+        <p:style>
+          <a:lnRef idx="1">
+            <a:schemeClr val="accent1"/>
+          </a:lnRef>
+          <a:fillRef idx="3">
+            <a:schemeClr val="accent1"/>
+          </a:fillRef>
+          <a:effectRef idx="2">
+            <a:schemeClr val="accent1"/>
+          </a:effectRef>
+          <a:fontRef idx="minor">
+            <a:schemeClr val="lt1"/>
+          </a:fontRef>
+        </p:style>
+        <p:txBody>
+          <a:bodyPr rtlCol="0" anchor="ctr" wrap="square"/>
+          <a:lstStyle/>
+          <a:p>
+            <a:pPr algn="ctr">
+              <a:spcAft>
+                <a:spcPts val="800"/>
+              </a:spcAft>
+              <a:defRPr sz="1300" b="1">
+                <a:solidFill>
+                  <a:srgbClr val="FFFFFF"/>
+                </a:solidFill>
+              </a:defRPr>
+            </a:pPr>
+            <a:r>
               <a:t>Future</a:t>
             </a:r>
           </a:p>
@@ -4570,7 +6028,7 @@
               </a:defRPr>
             </a:pPr>
             <a:r>
-              <a:t>AirFlows and Vascular overview</a:t>
+              <a:t>Airflow and Vascular overview</a:t>
             </a:r>
           </a:p>
         </p:txBody>
@@ -4803,7 +6261,7 @@
               </a:defRPr>
             </a:pPr>
             <a:r>
-              <a:t>AirFlows</a:t>
+              <a:t>Airflow</a:t>
             </a:r>
           </a:p>
           <a:p>
@@ -5468,7 +6926,7 @@
               </a:defRPr>
             </a:pPr>
             <a:r>
-              <a:t>AirFlows schedules jobs and triggers execution.</a:t>
+              <a:t>Airflow schedules jobs and triggers execution.</a:t>
             </a:r>
           </a:p>
           <a:p>
@@ -5533,7 +6991,7 @@
               </a:defRPr>
             </a:pPr>
             <a:r>
-              <a:t>AirFlows and Vascular overview</a:t>
+              <a:t>Airflow and Vascular overview</a:t>
             </a:r>
           </a:p>
         </p:txBody>
@@ -5810,7 +7268,7 @@
                         </a:defRPr>
                       </a:pPr>
                       <a:r>
-                        <a:t>AirFlows</a:t>
+                        <a:t>Airflow</a:t>
                       </a:r>
                     </a:p>
                   </a:txBody>
@@ -6332,7 +7790,7 @@
               </a:defRPr>
             </a:pPr>
             <a:r>
-              <a:t>AirFlows and Vascular overview</a:t>
+              <a:t>Airflow and Vascular overview</a:t>
             </a:r>
           </a:p>
         </p:txBody>
@@ -6473,7 +7931,7 @@
               </a:defRPr>
             </a:pPr>
             <a:r>
-              <a:t>AirFlows design</a:t>
+              <a:t>Airflow design</a:t>
             </a:r>
           </a:p>
         </p:txBody>
@@ -6863,7 +8321,7 @@
               </a:defRPr>
             </a:pPr>
             <a:r>
-              <a:t>AirFlows and Vascular overview</a:t>
+              <a:t>Airflow and Vascular overview</a:t>
             </a:r>
           </a:p>
         </p:txBody>
@@ -7422,7 +8880,7 @@
               </a:defRPr>
             </a:pPr>
             <a:r>
-              <a:t>AirFlows and Vascular overview</a:t>
+              <a:t>Airflow and Vascular overview</a:t>
             </a:r>
           </a:p>
         </p:txBody>
@@ -8339,7 +9797,7 @@
               </a:defRPr>
             </a:pPr>
             <a:r>
-              <a:t>AirFlows and Vascular overview</a:t>
+              <a:t>Airflow and Vascular overview</a:t>
             </a:r>
           </a:p>
         </p:txBody>
@@ -9023,7 +10481,7 @@
               </a:defRPr>
             </a:pPr>
             <a:r>
-              <a:t>AirFlows and Vascular overview</a:t>
+              <a:t>Airflow and Vascular overview</a:t>
             </a:r>
           </a:p>
         </p:txBody>
@@ -9212,8 +10670,8 @@
         </p:nvSpPr>
         <p:spPr>
           <a:xfrm>
-            <a:off x="502920" y="1234440"/>
-            <a:ext cx="3840480" cy="1051560"/>
+            <a:off x="502920" y="1207008"/>
+            <a:ext cx="1828800" cy="457200"/>
           </a:xfrm>
           <a:prstGeom prst="roundRect">
             <a:avLst/>
@@ -9242,13 +10700,10 @@
           </a:fontRef>
         </p:style>
         <p:txBody>
-          <a:bodyPr rtlCol="0" anchor="t" wrap="square"/>
-          <a:lstStyle/>
-          <a:p>
-            <a:pPr algn="l">
-              <a:spcAft>
-                <a:spcPts val="800"/>
-              </a:spcAft>
+          <a:bodyPr rtlCol="0" anchor="ctr" wrap="square"/>
+          <a:lstStyle/>
+          <a:p>
+            <a:pPr algn="ctr">
               <a:defRPr sz="1300" b="1">
                 <a:solidFill>
                   <a:srgbClr val="FFFFFF"/>
@@ -9256,57 +10711,56 @@
               </a:defRPr>
             </a:pPr>
             <a:r>
-              <a:t>Airflow: steps</a:t>
-            </a:r>
-          </a:p>
-          <a:p>
-            <a:pPr algn="l">
-              <a:defRPr sz="900">
-                <a:solidFill>
-                  <a:srgbClr val="D8E6F2"/>
-                </a:solidFill>
-              </a:defRPr>
-            </a:pPr>
-            <a:r>
-              <a:t>1. Use docker-compose (webserver, scheduler, worker, postgres, redis).</a:t>
-            </a:r>
-          </a:p>
-          <a:p>
-            <a:pPr algn="l">
-              <a:defRPr sz="900">
-                <a:solidFill>
-                  <a:srgbClr val="D8E6F2"/>
-                </a:solidFill>
-              </a:defRPr>
-            </a:pPr>
-            <a:r>
-              <a:t>2. Set env: VASCULAR_CELERY_BROKER_URL=redis://vascular-redis:6379/0 for FC pipeline.</a:t>
-            </a:r>
-          </a:p>
-          <a:p>
-            <a:pPr algn="l">
-              <a:defRPr sz="900">
-                <a:solidFill>
-                  <a:srgbClr val="D8E6F2"/>
-                </a:solidFill>
-              </a:defRPr>
-            </a:pPr>
-            <a:r>
-              <a:t>3. DAGs from volume dags/ (xml_dag_factory.py + dag_definitions/*.xml).</a:t>
-            </a:r>
-          </a:p>
-        </p:txBody>
-      </p:sp>
-      <p:sp>
-        <p:nvSpPr>
-          <p:cNvPr id="7" name="Rounded Rectangle 6"/>
+              <a:t>Airflow</a:t>
+            </a:r>
+          </a:p>
+        </p:txBody>
+      </p:sp>
+      <p:sp>
+        <p:nvSpPr>
+          <p:cNvPr id="7" name="TextBox 6"/>
+          <p:cNvSpPr txBox="1"/>
+          <p:nvPr/>
+        </p:nvSpPr>
+        <p:spPr>
+          <a:xfrm>
+            <a:off x="2421331" y="1362456"/>
+            <a:ext cx="182880" cy="164592"/>
+          </a:xfrm>
+          <a:prstGeom prst="rect">
+            <a:avLst/>
+          </a:prstGeom>
+          <a:noFill/>
+        </p:spPr>
+        <p:txBody>
+          <a:bodyPr wrap="none">
+            <a:spAutoFit/>
+          </a:bodyPr>
+          <a:lstStyle/>
+          <a:p>
+            <a:pPr algn="ctr">
+              <a:defRPr sz="1800" b="1">
+                <a:solidFill>
+                  <a:srgbClr val="4DB6E5"/>
+                </a:solidFill>
+              </a:defRPr>
+            </a:pPr>
+            <a:r>
+              <a:t>&gt;</a:t>
+            </a:r>
+          </a:p>
+        </p:txBody>
+      </p:sp>
+      <p:sp>
+        <p:nvSpPr>
+          <p:cNvPr id="8" name="Rounded Rectangle 7"/>
           <p:cNvSpPr/>
           <p:nvPr/>
         </p:nvSpPr>
         <p:spPr>
           <a:xfrm>
-            <a:off x="4526280" y="1234440"/>
-            <a:ext cx="4114800" cy="1051560"/>
+            <a:off x="2587752" y="1207008"/>
+            <a:ext cx="1828800" cy="457200"/>
           </a:xfrm>
           <a:prstGeom prst="roundRect">
             <a:avLst/>
@@ -9339,6 +10793,242 @@
           <a:lstStyle/>
           <a:p>
             <a:pPr algn="ctr">
+              <a:defRPr sz="1300" b="1">
+                <a:solidFill>
+                  <a:srgbClr val="FFFFFF"/>
+                </a:solidFill>
+              </a:defRPr>
+            </a:pPr>
+            <a:r>
+              <a:t>Redis</a:t>
+            </a:r>
+          </a:p>
+        </p:txBody>
+      </p:sp>
+      <p:sp>
+        <p:nvSpPr>
+          <p:cNvPr id="9" name="TextBox 8"/>
+          <p:cNvSpPr txBox="1"/>
+          <p:nvPr/>
+        </p:nvSpPr>
+        <p:spPr>
+          <a:xfrm>
+            <a:off x="4506163" y="1362456"/>
+            <a:ext cx="182880" cy="164592"/>
+          </a:xfrm>
+          <a:prstGeom prst="rect">
+            <a:avLst/>
+          </a:prstGeom>
+          <a:noFill/>
+        </p:spPr>
+        <p:txBody>
+          <a:bodyPr wrap="none">
+            <a:spAutoFit/>
+          </a:bodyPr>
+          <a:lstStyle/>
+          <a:p>
+            <a:pPr algn="ctr">
+              <a:defRPr sz="1800" b="1">
+                <a:solidFill>
+                  <a:srgbClr val="4DB6E5"/>
+                </a:solidFill>
+              </a:defRPr>
+            </a:pPr>
+            <a:r>
+              <a:t>&gt;</a:t>
+            </a:r>
+          </a:p>
+        </p:txBody>
+      </p:sp>
+      <p:sp>
+        <p:nvSpPr>
+          <p:cNvPr id="10" name="Rounded Rectangle 9"/>
+          <p:cNvSpPr/>
+          <p:nvPr/>
+        </p:nvSpPr>
+        <p:spPr>
+          <a:xfrm>
+            <a:off x="4672584" y="1207008"/>
+            <a:ext cx="1828800" cy="457200"/>
+          </a:xfrm>
+          <a:prstGeom prst="roundRect">
+            <a:avLst/>
+          </a:prstGeom>
+          <a:solidFill>
+            <a:srgbClr val="295683"/>
+          </a:solidFill>
+          <a:ln w="12700">
+            <a:solidFill>
+              <a:srgbClr val="5D7B9D"/>
+            </a:solidFill>
+          </a:ln>
+        </p:spPr>
+        <p:style>
+          <a:lnRef idx="1">
+            <a:schemeClr val="accent1"/>
+          </a:lnRef>
+          <a:fillRef idx="3">
+            <a:schemeClr val="accent1"/>
+          </a:fillRef>
+          <a:effectRef idx="2">
+            <a:schemeClr val="accent1"/>
+          </a:effectRef>
+          <a:fontRef idx="minor">
+            <a:schemeClr val="lt1"/>
+          </a:fontRef>
+        </p:style>
+        <p:txBody>
+          <a:bodyPr rtlCol="0" anchor="ctr" wrap="square"/>
+          <a:lstStyle/>
+          <a:p>
+            <a:pPr algn="ctr">
+              <a:defRPr sz="1300" b="1">
+                <a:solidFill>
+                  <a:srgbClr val="FFFFFF"/>
+                </a:solidFill>
+              </a:defRPr>
+            </a:pPr>
+            <a:r>
+              <a:t>Vascular</a:t>
+            </a:r>
+          </a:p>
+        </p:txBody>
+      </p:sp>
+      <p:sp>
+        <p:nvSpPr>
+          <p:cNvPr id="11" name="Rounded Rectangle 10"/>
+          <p:cNvSpPr/>
+          <p:nvPr/>
+        </p:nvSpPr>
+        <p:spPr>
+          <a:xfrm>
+            <a:off x="502920" y="1828800"/>
+            <a:ext cx="3840480" cy="960120"/>
+          </a:xfrm>
+          <a:prstGeom prst="roundRect">
+            <a:avLst/>
+          </a:prstGeom>
+          <a:solidFill>
+            <a:srgbClr val="295683"/>
+          </a:solidFill>
+          <a:ln w="12700">
+            <a:solidFill>
+              <a:srgbClr val="5D7B9D"/>
+            </a:solidFill>
+          </a:ln>
+        </p:spPr>
+        <p:style>
+          <a:lnRef idx="1">
+            <a:schemeClr val="accent1"/>
+          </a:lnRef>
+          <a:fillRef idx="3">
+            <a:schemeClr val="accent1"/>
+          </a:fillRef>
+          <a:effectRef idx="2">
+            <a:schemeClr val="accent1"/>
+          </a:effectRef>
+          <a:fontRef idx="minor">
+            <a:schemeClr val="lt1"/>
+          </a:fontRef>
+        </p:style>
+        <p:txBody>
+          <a:bodyPr rtlCol="0" anchor="t" wrap="square"/>
+          <a:lstStyle/>
+          <a:p>
+            <a:pPr algn="l">
+              <a:spcAft>
+                <a:spcPts val="800"/>
+              </a:spcAft>
+              <a:defRPr sz="1300" b="1">
+                <a:solidFill>
+                  <a:srgbClr val="FFFFFF"/>
+                </a:solidFill>
+              </a:defRPr>
+            </a:pPr>
+            <a:r>
+              <a:t>Airflow: steps</a:t>
+            </a:r>
+          </a:p>
+          <a:p>
+            <a:pPr algn="l">
+              <a:defRPr sz="900">
+                <a:solidFill>
+                  <a:srgbClr val="D8E6F2"/>
+                </a:solidFill>
+              </a:defRPr>
+            </a:pPr>
+            <a:r>
+              <a:t>1. Use docker-compose (webserver, scheduler, worker, postgres, redis).</a:t>
+            </a:r>
+          </a:p>
+          <a:p>
+            <a:pPr algn="l">
+              <a:defRPr sz="900">
+                <a:solidFill>
+                  <a:srgbClr val="D8E6F2"/>
+                </a:solidFill>
+              </a:defRPr>
+            </a:pPr>
+            <a:r>
+              <a:t>2. Set env: VASCULAR_CELERY_BROKER_URL=redis://vascular-redis:6379/0 for FC pipeline.</a:t>
+            </a:r>
+          </a:p>
+          <a:p>
+            <a:pPr algn="l">
+              <a:defRPr sz="900">
+                <a:solidFill>
+                  <a:srgbClr val="D8E6F2"/>
+                </a:solidFill>
+              </a:defRPr>
+            </a:pPr>
+            <a:r>
+              <a:t>3. DAGs from volume dags/ (xml_dag_factory.py + dag_definitions/*.xml).</a:t>
+            </a:r>
+          </a:p>
+        </p:txBody>
+      </p:sp>
+      <p:sp>
+        <p:nvSpPr>
+          <p:cNvPr id="12" name="Rounded Rectangle 11"/>
+          <p:cNvSpPr/>
+          <p:nvPr/>
+        </p:nvSpPr>
+        <p:spPr>
+          <a:xfrm>
+            <a:off x="4526280" y="1828800"/>
+            <a:ext cx="4114800" cy="960120"/>
+          </a:xfrm>
+          <a:prstGeom prst="roundRect">
+            <a:avLst/>
+          </a:prstGeom>
+          <a:solidFill>
+            <a:srgbClr val="295683"/>
+          </a:solidFill>
+          <a:ln w="12700">
+            <a:solidFill>
+              <a:srgbClr val="5D7B9D"/>
+            </a:solidFill>
+          </a:ln>
+        </p:spPr>
+        <p:style>
+          <a:lnRef idx="1">
+            <a:schemeClr val="accent1"/>
+          </a:lnRef>
+          <a:fillRef idx="3">
+            <a:schemeClr val="accent1"/>
+          </a:fillRef>
+          <a:effectRef idx="2">
+            <a:schemeClr val="accent1"/>
+          </a:effectRef>
+          <a:fontRef idx="minor">
+            <a:schemeClr val="lt1"/>
+          </a:fontRef>
+        </p:style>
+        <p:txBody>
+          <a:bodyPr rtlCol="0" anchor="ctr" wrap="square"/>
+          <a:lstStyle/>
+          <a:p>
+            <a:pPr algn="ctr">
               <a:spcAft>
                 <a:spcPts val="600"/>
               </a:spcAft>
@@ -9364,7 +11054,7 @@
               </a:defRPr>
             </a:pPr>
             <a:r>
-              <a:t>cd AirFlows_P</a:t>
+              <a:t>cd &lt;airflow-project-dir&gt;</a:t>
             </a:r>
           </a:p>
           <a:p>
@@ -9401,14 +11091,14 @@
       </p:sp>
       <p:sp>
         <p:nvSpPr>
-          <p:cNvPr id="8" name="Rounded Rectangle 7"/>
+          <p:cNvPr id="13" name="Rounded Rectangle 12"/>
           <p:cNvSpPr/>
           <p:nvPr/>
         </p:nvSpPr>
         <p:spPr>
           <a:xfrm>
-            <a:off x="502920" y="2468880"/>
-            <a:ext cx="3840480" cy="1097280"/>
+            <a:off x="502920" y="2971800"/>
+            <a:ext cx="3840480" cy="1005840"/>
           </a:xfrm>
           <a:prstGeom prst="roundRect">
             <a:avLst/>
@@ -9494,14 +11184,14 @@
       </p:sp>
       <p:sp>
         <p:nvSpPr>
-          <p:cNvPr id="9" name="Rounded Rectangle 8"/>
+          <p:cNvPr id="14" name="Rounded Rectangle 13"/>
           <p:cNvSpPr/>
           <p:nvPr/>
         </p:nvSpPr>
         <p:spPr>
           <a:xfrm>
-            <a:off x="4526280" y="2468880"/>
-            <a:ext cx="4114800" cy="1097280"/>
+            <a:off x="4526280" y="2971800"/>
+            <a:ext cx="4114800" cy="1005840"/>
           </a:xfrm>
           <a:prstGeom prst="roundRect">
             <a:avLst/>
@@ -9596,14 +11286,14 @@
       </p:sp>
       <p:sp>
         <p:nvSpPr>
-          <p:cNvPr id="10" name="Rounded Rectangle 9"/>
+          <p:cNvPr id="15" name="Rounded Rectangle 14"/>
           <p:cNvSpPr/>
           <p:nvPr/>
         </p:nvSpPr>
         <p:spPr>
           <a:xfrm>
-            <a:off x="502920" y="3794760"/>
-            <a:ext cx="8183879" cy="685800"/>
+            <a:off x="502920" y="4160520"/>
+            <a:ext cx="8183879" cy="640080"/>
           </a:xfrm>
           <a:prstGeom prst="roundRect">
             <a:avLst/>
@@ -9670,14 +11360,14 @@
               </a:defRPr>
             </a:pPr>
             <a:r>
-              <a:t>Option A (HTTP): no shared broker; in XML use trigger url="http://vascular-api:8000/..." instead.</a:t>
-            </a:r>
-          </a:p>
-        </p:txBody>
-      </p:sp>
-      <p:sp>
-        <p:nvSpPr>
-          <p:cNvPr id="11" name="TextBox 10"/>
+              <a:t>Celery trigger in XML: type="celery" task="&lt;name&gt;"; requires shared broker (see example on next slides).</a:t>
+            </a:r>
+          </a:p>
+        </p:txBody>
+      </p:sp>
+      <p:sp>
+        <p:nvSpPr>
+          <p:cNvPr id="16" name="TextBox 15"/>
           <p:cNvSpPr txBox="1"/>
           <p:nvPr/>
         </p:nvSpPr>
@@ -9846,7 +11536,7 @@
               </a:defRPr>
             </a:pPr>
             <a:r>
-              <a:t>Deployment and operations (2) — Config and usage</a:t>
+              <a:t>Deployment and operations (2) — Volumes and CI</a:t>
             </a:r>
           </a:p>
         </p:txBody>
@@ -9895,7 +11585,7 @@
         <p:spPr>
           <a:xfrm>
             <a:off x="502920" y="1234440"/>
-            <a:ext cx="3657600" cy="914400"/>
+            <a:ext cx="3657600" cy="1234440"/>
           </a:xfrm>
           <a:prstGeom prst="roundRect">
             <a:avLst/>
@@ -9976,7 +11666,7 @@
         <p:spPr>
           <a:xfrm>
             <a:off x="4343400" y="1234440"/>
-            <a:ext cx="4343400" cy="914400"/>
+            <a:ext cx="4297680" cy="1234440"/>
           </a:xfrm>
           <a:prstGeom prst="roundRect">
             <a:avLst/>
@@ -10056,8 +11746,8 @@
         </p:nvSpPr>
         <p:spPr>
           <a:xfrm>
-            <a:off x="502920" y="2331720"/>
-            <a:ext cx="8183879" cy="1417320"/>
+            <a:off x="502920" y="2697480"/>
+            <a:ext cx="3474720" cy="438912"/>
           </a:xfrm>
           <a:prstGeom prst="roundRect">
             <a:avLst/>
@@ -10090,91 +11780,117 @@
           <a:lstStyle/>
           <a:p>
             <a:pPr algn="ctr">
-              <a:spcAft>
-                <a:spcPts val="600"/>
-              </a:spcAft>
-              <a:defRPr sz="1100" b="1">
+              <a:defRPr sz="1300" b="1">
+                <a:solidFill>
+                  <a:srgbClr val="FFFFFF"/>
+                </a:solidFill>
+              </a:defRPr>
+            </a:pPr>
+            <a:r>
+              <a:t>vascular-configs</a:t>
+            </a:r>
+          </a:p>
+        </p:txBody>
+      </p:sp>
+      <p:sp>
+        <p:nvSpPr>
+          <p:cNvPr id="9" name="TextBox 8"/>
+          <p:cNvSpPr txBox="1"/>
+          <p:nvPr/>
+        </p:nvSpPr>
+        <p:spPr>
+          <a:xfrm>
+            <a:off x="4105655" y="2843784"/>
+            <a:ext cx="182880" cy="164592"/>
+          </a:xfrm>
+          <a:prstGeom prst="rect">
+            <a:avLst/>
+          </a:prstGeom>
+          <a:noFill/>
+        </p:spPr>
+        <p:txBody>
+          <a:bodyPr wrap="none">
+            <a:spAutoFit/>
+          </a:bodyPr>
+          <a:lstStyle/>
+          <a:p>
+            <a:pPr algn="ctr">
+              <a:defRPr sz="1800" b="1">
                 <a:solidFill>
                   <a:srgbClr val="4DB6E5"/>
                 </a:solidFill>
               </a:defRPr>
             </a:pPr>
             <a:r>
-              <a:t>Example: Airflow XML DAG triggering Vascular via HTTP (Option A)</a:t>
-            </a:r>
-          </a:p>
-          <a:p>
-            <a:pPr>
-              <a:spcAft>
-                <a:spcPts val="200"/>
-              </a:spcAft>
-              <a:defRPr sz="1100">
-                <a:solidFill>
-                  <a:srgbClr val="D8E6F2"/>
-                </a:solidFill>
-              </a:defRPr>
-            </a:pPr>
-            <a:r>
-              <a:t>&lt;dag id="vascular_via_api" schedule="0 8 * * *" description="Trigger Vascular via API"&gt;</a:t>
-            </a:r>
-          </a:p>
-          <a:p>
-            <a:pPr>
-              <a:spcAft>
-                <a:spcPts val="200"/>
-              </a:spcAft>
-              <a:defRPr sz="1100">
-                <a:solidFill>
-                  <a:srgbClr val="D8E6F2"/>
-                </a:solidFill>
-              </a:defRPr>
-            </a:pPr>
-            <a:r>
-              <a:t>  &lt;trigger url="http://vascular-api:8000/api/v1/communicators/process" method="post"/&gt;</a:t>
-            </a:r>
-          </a:p>
-          <a:p>
-            <a:pPr>
-              <a:spcAft>
-                <a:spcPts val="200"/>
-              </a:spcAft>
-              <a:defRPr sz="1100">
-                <a:solidFill>
-                  <a:srgbClr val="D8E6F2"/>
-                </a:solidFill>
-              </a:defRPr>
-            </a:pPr>
-            <a:r>
-              <a:t>&lt;/dag&gt;</a:t>
-            </a:r>
-          </a:p>
-          <a:p>
-            <a:pPr>
-              <a:spcAft>
-                <a:spcPts val="200"/>
-              </a:spcAft>
-              <a:defRPr sz="1100">
-                <a:solidFill>
-                  <a:srgbClr val="D8E6F2"/>
-                </a:solidFill>
-              </a:defRPr>
-            </a:pPr>
-            <a:r>
-              <a:t>Place in dag_definitions/*.xml. No VASCULAR_CELERY_BROKER_URL needed; Vascular uses its own Redis.</a:t>
-            </a:r>
-          </a:p>
-        </p:txBody>
-      </p:sp>
-      <p:sp>
-        <p:nvSpPr>
-          <p:cNvPr id="9" name="Rounded Rectangle 8"/>
+              <a:t>&gt;</a:t>
+            </a:r>
+          </a:p>
+        </p:txBody>
+      </p:sp>
+      <p:sp>
+        <p:nvSpPr>
+          <p:cNvPr id="10" name="Rounded Rectangle 9"/>
           <p:cNvSpPr/>
           <p:nvPr/>
         </p:nvSpPr>
         <p:spPr>
           <a:xfrm>
-            <a:off x="502920" y="3977639"/>
-            <a:ext cx="4023360" cy="822960"/>
+            <a:off x="4343400" y="2697480"/>
+            <a:ext cx="3474720" cy="438912"/>
+          </a:xfrm>
+          <a:prstGeom prst="roundRect">
+            <a:avLst/>
+          </a:prstGeom>
+          <a:solidFill>
+            <a:srgbClr val="295683"/>
+          </a:solidFill>
+          <a:ln w="12700">
+            <a:solidFill>
+              <a:srgbClr val="5D7B9D"/>
+            </a:solidFill>
+          </a:ln>
+        </p:spPr>
+        <p:style>
+          <a:lnRef idx="1">
+            <a:schemeClr val="accent1"/>
+          </a:lnRef>
+          <a:fillRef idx="3">
+            <a:schemeClr val="accent1"/>
+          </a:fillRef>
+          <a:effectRef idx="2">
+            <a:schemeClr val="accent1"/>
+          </a:effectRef>
+          <a:fontRef idx="minor">
+            <a:schemeClr val="lt1"/>
+          </a:fontRef>
+        </p:style>
+        <p:txBody>
+          <a:bodyPr rtlCol="0" anchor="ctr" wrap="square"/>
+          <a:lstStyle/>
+          <a:p>
+            <a:pPr algn="ctr">
+              <a:defRPr sz="1300" b="1">
+                <a:solidFill>
+                  <a:srgbClr val="FFFFFF"/>
+                </a:solidFill>
+              </a:defRPr>
+            </a:pPr>
+            <a:r>
+              <a:t>vascular-data</a:t>
+            </a:r>
+          </a:p>
+        </p:txBody>
+      </p:sp>
+      <p:sp>
+        <p:nvSpPr>
+          <p:cNvPr id="11" name="Rounded Rectangle 10"/>
+          <p:cNvSpPr/>
+          <p:nvPr/>
+        </p:nvSpPr>
+        <p:spPr>
+          <a:xfrm>
+            <a:off x="502920" y="3246120"/>
+            <a:ext cx="3657600" cy="777240"/>
           </a:xfrm>
           <a:prstGeom prst="roundRect">
             <a:avLst/>
@@ -10203,10 +11919,10 @@
           </a:fontRef>
         </p:style>
         <p:txBody>
-          <a:bodyPr rtlCol="0" anchor="t" wrap="square"/>
-          <a:lstStyle/>
-          <a:p>
-            <a:pPr algn="l">
+          <a:bodyPr rtlCol="0" anchor="ctr" wrap="square"/>
+          <a:lstStyle/>
+          <a:p>
+            <a:pPr algn="ctr">
               <a:spcAft>
                 <a:spcPts val="800"/>
               </a:spcAft>
@@ -10217,45 +11933,33 @@
               </a:defRPr>
             </a:pPr>
             <a:r>
-              <a:t>Monitoring</a:t>
-            </a:r>
-          </a:p>
-          <a:p>
-            <a:pPr algn="l">
-              <a:defRPr sz="900">
+              <a:t>Configs path</a:t>
+            </a:r>
+          </a:p>
+          <a:p>
+            <a:pPr algn="ctr">
+              <a:defRPr sz="1100">
                 <a:solidFill>
                   <a:srgbClr val="D8E6F2"/>
                 </a:solidFill>
               </a:defRPr>
             </a:pPr>
             <a:r>
-              <a:t>Airflow UI: 12 tasks per FC run (6 send + 6 wait). Filter by DAG or tags (e.g. vascular, fc).</a:t>
-            </a:r>
-          </a:p>
-          <a:p>
-            <a:pPr algn="l">
-              <a:defRPr sz="900">
-                <a:solidFill>
-                  <a:srgbClr val="D8E6F2"/>
-                </a:solidFill>
-              </a:defRPr>
-            </a:pPr>
-            <a:r>
-              <a:t>Ensure vascular-worker is up; check Redis / PipelineContext if a step fails.</a:t>
-            </a:r>
-          </a:p>
-        </p:txBody>
-      </p:sp>
-      <p:sp>
-        <p:nvSpPr>
-          <p:cNvPr id="10" name="Rounded Rectangle 9"/>
+              <a:t>/app/configs</a:t>
+            </a:r>
+          </a:p>
+        </p:txBody>
+      </p:sp>
+      <p:sp>
+        <p:nvSpPr>
+          <p:cNvPr id="12" name="Rounded Rectangle 11"/>
           <p:cNvSpPr/>
           <p:nvPr/>
         </p:nvSpPr>
         <p:spPr>
           <a:xfrm>
-            <a:off x="4663440" y="3977639"/>
-            <a:ext cx="4023360" cy="822960"/>
+            <a:off x="4343400" y="3246120"/>
+            <a:ext cx="4297680" cy="777240"/>
           </a:xfrm>
           <a:prstGeom prst="roundRect">
             <a:avLst/>
@@ -10284,10 +11988,10 @@
           </a:fontRef>
         </p:style>
         <p:txBody>
-          <a:bodyPr rtlCol="0" anchor="t" wrap="square"/>
-          <a:lstStyle/>
-          <a:p>
-            <a:pPr algn="l">
+          <a:bodyPr rtlCol="0" anchor="ctr" wrap="square"/>
+          <a:lstStyle/>
+          <a:p>
+            <a:pPr algn="ctr">
               <a:spcAft>
                 <a:spcPts val="800"/>
               </a:spcAft>
@@ -10298,45 +12002,87 @@
               </a:defRPr>
             </a:pPr>
             <a:r>
-              <a:t>After config change</a:t>
-            </a:r>
-          </a:p>
-          <a:p>
-            <a:pPr algn="l">
-              <a:defRPr sz="900">
+              <a:t>Data path</a:t>
+            </a:r>
+          </a:p>
+          <a:p>
+            <a:pPr algn="ctr">
+              <a:defRPr sz="1100">
                 <a:solidFill>
                   <a:srgbClr val="D8E6F2"/>
                 </a:solidFill>
               </a:defRPr>
             </a:pPr>
             <a:r>
-              <a:t>Config/data-only: redeploy runs volume sync; restart worker if app must reload config.</a:t>
-            </a:r>
-          </a:p>
-          <a:p>
-            <a:pPr algn="l">
-              <a:defRPr sz="900">
-                <a:solidFill>
-                  <a:srgbClr val="D8E6F2"/>
-                </a:solidFill>
-              </a:defRPr>
-            </a:pPr>
-            <a:r>
-              <a:t>CI pre_production_test: DB (MySQL/Sybase) and SMTP (mailhost:25) checks.</a:t>
-            </a:r>
-          </a:p>
-        </p:txBody>
-      </p:sp>
-      <p:sp>
-        <p:nvSpPr>
-          <p:cNvPr id="11" name="TextBox 10"/>
+              <a:t>/app/data</a:t>
+            </a:r>
+          </a:p>
+        </p:txBody>
+      </p:sp>
+      <p:sp>
+        <p:nvSpPr>
+          <p:cNvPr id="13" name="Rounded Rectangle 12"/>
+          <p:cNvSpPr/>
+          <p:nvPr/>
+        </p:nvSpPr>
+        <p:spPr>
+          <a:xfrm>
+            <a:off x="502920" y="4206240"/>
+            <a:ext cx="2377440" cy="411480"/>
+          </a:xfrm>
+          <a:prstGeom prst="roundRect">
+            <a:avLst/>
+          </a:prstGeom>
+          <a:solidFill>
+            <a:srgbClr val="295683"/>
+          </a:solidFill>
+          <a:ln w="12700">
+            <a:solidFill>
+              <a:srgbClr val="5D7B9D"/>
+            </a:solidFill>
+          </a:ln>
+        </p:spPr>
+        <p:style>
+          <a:lnRef idx="1">
+            <a:schemeClr val="accent1"/>
+          </a:lnRef>
+          <a:fillRef idx="3">
+            <a:schemeClr val="accent1"/>
+          </a:fillRef>
+          <a:effectRef idx="2">
+            <a:schemeClr val="accent1"/>
+          </a:effectRef>
+          <a:fontRef idx="minor">
+            <a:schemeClr val="lt1"/>
+          </a:fontRef>
+        </p:style>
+        <p:txBody>
+          <a:bodyPr rtlCol="0" anchor="ctr" wrap="square"/>
+          <a:lstStyle/>
+          <a:p>
+            <a:pPr algn="ctr">
+              <a:defRPr sz="1300" b="1">
+                <a:solidFill>
+                  <a:srgbClr val="FFFFFF"/>
+                </a:solidFill>
+              </a:defRPr>
+            </a:pPr>
+            <a:r>
+              <a:t>Config only?</a:t>
+            </a:r>
+          </a:p>
+        </p:txBody>
+      </p:sp>
+      <p:sp>
+        <p:nvSpPr>
+          <p:cNvPr id="14" name="TextBox 13"/>
           <p:cNvSpPr txBox="1"/>
           <p:nvPr/>
         </p:nvSpPr>
         <p:spPr>
           <a:xfrm>
-            <a:off x="502920" y="6400800"/>
-            <a:ext cx="7772400" cy="182880"/>
+            <a:off x="2960370" y="4338827"/>
+            <a:ext cx="182880" cy="164592"/>
           </a:xfrm>
           <a:prstGeom prst="rect">
             <a:avLst/>
@@ -10349,6 +12095,238 @@
           </a:bodyPr>
           <a:lstStyle/>
           <a:p>
+            <a:pPr algn="ctr">
+              <a:defRPr sz="1800" b="1">
+                <a:solidFill>
+                  <a:srgbClr val="4DB6E5"/>
+                </a:solidFill>
+              </a:defRPr>
+            </a:pPr>
+            <a:r>
+              <a:t>&gt;</a:t>
+            </a:r>
+          </a:p>
+        </p:txBody>
+      </p:sp>
+      <p:sp>
+        <p:nvSpPr>
+          <p:cNvPr id="15" name="Rounded Rectangle 14"/>
+          <p:cNvSpPr/>
+          <p:nvPr/>
+        </p:nvSpPr>
+        <p:spPr>
+          <a:xfrm>
+            <a:off x="3108960" y="4206240"/>
+            <a:ext cx="2377440" cy="411480"/>
+          </a:xfrm>
+          <a:prstGeom prst="roundRect">
+            <a:avLst/>
+          </a:prstGeom>
+          <a:solidFill>
+            <a:srgbClr val="295683"/>
+          </a:solidFill>
+          <a:ln w="12700">
+            <a:solidFill>
+              <a:srgbClr val="5D7B9D"/>
+            </a:solidFill>
+          </a:ln>
+        </p:spPr>
+        <p:style>
+          <a:lnRef idx="1">
+            <a:schemeClr val="accent1"/>
+          </a:lnRef>
+          <a:fillRef idx="3">
+            <a:schemeClr val="accent1"/>
+          </a:fillRef>
+          <a:effectRef idx="2">
+            <a:schemeClr val="accent1"/>
+          </a:effectRef>
+          <a:fontRef idx="minor">
+            <a:schemeClr val="lt1"/>
+          </a:fontRef>
+        </p:style>
+        <p:txBody>
+          <a:bodyPr rtlCol="0" anchor="ctr" wrap="square"/>
+          <a:lstStyle/>
+          <a:p>
+            <a:pPr algn="ctr">
+              <a:defRPr sz="1300" b="1">
+                <a:solidFill>
+                  <a:srgbClr val="FFFFFF"/>
+                </a:solidFill>
+              </a:defRPr>
+            </a:pPr>
+            <a:r>
+              <a:t>Volume sync</a:t>
+            </a:r>
+          </a:p>
+        </p:txBody>
+      </p:sp>
+      <p:sp>
+        <p:nvSpPr>
+          <p:cNvPr id="16" name="Rounded Rectangle 15"/>
+          <p:cNvSpPr/>
+          <p:nvPr/>
+        </p:nvSpPr>
+        <p:spPr>
+          <a:xfrm>
+            <a:off x="3520440" y="4206240"/>
+            <a:ext cx="2377440" cy="411480"/>
+          </a:xfrm>
+          <a:prstGeom prst="roundRect">
+            <a:avLst/>
+          </a:prstGeom>
+          <a:solidFill>
+            <a:srgbClr val="295683"/>
+          </a:solidFill>
+          <a:ln w="12700">
+            <a:solidFill>
+              <a:srgbClr val="5D7B9D"/>
+            </a:solidFill>
+          </a:ln>
+        </p:spPr>
+        <p:style>
+          <a:lnRef idx="1">
+            <a:schemeClr val="accent1"/>
+          </a:lnRef>
+          <a:fillRef idx="3">
+            <a:schemeClr val="accent1"/>
+          </a:fillRef>
+          <a:effectRef idx="2">
+            <a:schemeClr val="accent1"/>
+          </a:effectRef>
+          <a:fontRef idx="minor">
+            <a:schemeClr val="lt1"/>
+          </a:fontRef>
+        </p:style>
+        <p:txBody>
+          <a:bodyPr rtlCol="0" anchor="ctr" wrap="square"/>
+          <a:lstStyle/>
+          <a:p>
+            <a:pPr algn="ctr">
+              <a:defRPr sz="1300" b="1">
+                <a:solidFill>
+                  <a:srgbClr val="FFFFFF"/>
+                </a:solidFill>
+              </a:defRPr>
+            </a:pPr>
+            <a:r>
+              <a:t>Code change?</a:t>
+            </a:r>
+          </a:p>
+        </p:txBody>
+      </p:sp>
+      <p:sp>
+        <p:nvSpPr>
+          <p:cNvPr id="17" name="TextBox 16"/>
+          <p:cNvSpPr txBox="1"/>
+          <p:nvPr/>
+        </p:nvSpPr>
+        <p:spPr>
+          <a:xfrm>
+            <a:off x="5977890" y="4338827"/>
+            <a:ext cx="182880" cy="164592"/>
+          </a:xfrm>
+          <a:prstGeom prst="rect">
+            <a:avLst/>
+          </a:prstGeom>
+          <a:noFill/>
+        </p:spPr>
+        <p:txBody>
+          <a:bodyPr wrap="none">
+            <a:spAutoFit/>
+          </a:bodyPr>
+          <a:lstStyle/>
+          <a:p>
+            <a:pPr algn="ctr">
+              <a:defRPr sz="1800" b="1">
+                <a:solidFill>
+                  <a:srgbClr val="4DB6E5"/>
+                </a:solidFill>
+              </a:defRPr>
+            </a:pPr>
+            <a:r>
+              <a:t>&gt;</a:t>
+            </a:r>
+          </a:p>
+        </p:txBody>
+      </p:sp>
+      <p:sp>
+        <p:nvSpPr>
+          <p:cNvPr id="18" name="Rounded Rectangle 17"/>
+          <p:cNvSpPr/>
+          <p:nvPr/>
+        </p:nvSpPr>
+        <p:spPr>
+          <a:xfrm>
+            <a:off x="6126480" y="4206240"/>
+            <a:ext cx="2377440" cy="411480"/>
+          </a:xfrm>
+          <a:prstGeom prst="roundRect">
+            <a:avLst/>
+          </a:prstGeom>
+          <a:solidFill>
+            <a:srgbClr val="295683"/>
+          </a:solidFill>
+          <a:ln w="12700">
+            <a:solidFill>
+              <a:srgbClr val="5D7B9D"/>
+            </a:solidFill>
+          </a:ln>
+        </p:spPr>
+        <p:style>
+          <a:lnRef idx="1">
+            <a:schemeClr val="accent1"/>
+          </a:lnRef>
+          <a:fillRef idx="3">
+            <a:schemeClr val="accent1"/>
+          </a:fillRef>
+          <a:effectRef idx="2">
+            <a:schemeClr val="accent1"/>
+          </a:effectRef>
+          <a:fontRef idx="minor">
+            <a:schemeClr val="lt1"/>
+          </a:fontRef>
+        </p:style>
+        <p:txBody>
+          <a:bodyPr rtlCol="0" anchor="ctr" wrap="square"/>
+          <a:lstStyle/>
+          <a:p>
+            <a:pPr algn="ctr">
+              <a:defRPr sz="1300" b="1">
+                <a:solidFill>
+                  <a:srgbClr val="FFFFFF"/>
+                </a:solidFill>
+              </a:defRPr>
+            </a:pPr>
+            <a:r>
+              <a:t>Build + up</a:t>
+            </a:r>
+          </a:p>
+        </p:txBody>
+      </p:sp>
+      <p:sp>
+        <p:nvSpPr>
+          <p:cNvPr id="19" name="TextBox 18"/>
+          <p:cNvSpPr txBox="1"/>
+          <p:nvPr/>
+        </p:nvSpPr>
+        <p:spPr>
+          <a:xfrm>
+            <a:off x="502920" y="6400800"/>
+            <a:ext cx="7772400" cy="182880"/>
+          </a:xfrm>
+          <a:prstGeom prst="rect">
+            <a:avLst/>
+          </a:prstGeom>
+          <a:noFill/>
+        </p:spPr>
+        <p:txBody>
+          <a:bodyPr wrap="none">
+            <a:spAutoFit/>
+          </a:bodyPr>
+          <a:lstStyle/>
+          <a:p>
             <a:pPr>
               <a:defRPr sz="900">
                 <a:solidFill>
@@ -10357,7 +12335,7 @@
               </a:defRPr>
             </a:pPr>
             <a:r>
-              <a:t>References: README, OPERATION_GUIDE.md, vascular_http_example.xml.</a:t>
+              <a:t>Named Volumes only; no bind mounts (host permission constraints).</a:t>
             </a:r>
           </a:p>
         </p:txBody>
